--- a/Lectures/09.SBI/Lecture_SBI.pptx
+++ b/Lectures/09.SBI/Lecture_SBI.pptx
@@ -5,10 +5,10 @@
     <p:sldMasterId id="2147483648" r:id="rId1"/>
   </p:sldMasterIdLst>
   <p:notesMasterIdLst>
-    <p:notesMasterId r:id="rId20"/>
+    <p:notesMasterId r:id="rId21"/>
   </p:notesMasterIdLst>
   <p:handoutMasterIdLst>
-    <p:handoutMasterId r:id="rId21"/>
+    <p:handoutMasterId r:id="rId22"/>
   </p:handoutMasterIdLst>
   <p:sldIdLst>
     <p:sldId id="257" r:id="rId2"/>
@@ -19,16 +19,17 @@
     <p:sldId id="1160" r:id="rId7"/>
     <p:sldId id="1159" r:id="rId8"/>
     <p:sldId id="1157" r:id="rId9"/>
-    <p:sldId id="1161" r:id="rId10"/>
-    <p:sldId id="1162" r:id="rId11"/>
-    <p:sldId id="1163" r:id="rId12"/>
-    <p:sldId id="1164" r:id="rId13"/>
-    <p:sldId id="1088" r:id="rId14"/>
-    <p:sldId id="1169" r:id="rId15"/>
-    <p:sldId id="1166" r:id="rId16"/>
-    <p:sldId id="1165" r:id="rId17"/>
-    <p:sldId id="1167" r:id="rId18"/>
-    <p:sldId id="1168" r:id="rId19"/>
+    <p:sldId id="1170" r:id="rId10"/>
+    <p:sldId id="1161" r:id="rId11"/>
+    <p:sldId id="1162" r:id="rId12"/>
+    <p:sldId id="1163" r:id="rId13"/>
+    <p:sldId id="1164" r:id="rId14"/>
+    <p:sldId id="1088" r:id="rId15"/>
+    <p:sldId id="1169" r:id="rId16"/>
+    <p:sldId id="1166" r:id="rId17"/>
+    <p:sldId id="1165" r:id="rId18"/>
+    <p:sldId id="1167" r:id="rId19"/>
+    <p:sldId id="1168" r:id="rId20"/>
   </p:sldIdLst>
   <p:sldSz cx="9144000" cy="6858000" type="letter"/>
   <p:notesSz cx="9601200" cy="7315200"/>
@@ -894,7 +895,7 @@
               <a:pPr>
                 <a:defRPr/>
               </a:pPr>
-              <a:t>17</a:t>
+              <a:t>18</a:t>
             </a:fld>
             <a:endParaRPr lang="en-US"/>
           </a:p>
@@ -3201,6 +3202,653 @@
         <p:cNvPr id="1" name="">
           <a:extLst>
             <a:ext uri="{FF2B5EF4-FFF2-40B4-BE49-F238E27FC236}">
+              <a16:creationId xmlns:a16="http://schemas.microsoft.com/office/drawing/2014/main" id="{A5917AC2-0595-9D9E-EAF3-79228ADA3BCC}"/>
+            </a:ext>
+          </a:extLst>
+        </p:cNvPr>
+        <p:cNvGrpSpPr/>
+        <p:nvPr/>
+      </p:nvGrpSpPr>
+      <p:grpSpPr>
+        <a:xfrm>
+          <a:off x="0" y="0"/>
+          <a:ext cx="0" cy="0"/>
+          <a:chOff x="0" y="0"/>
+          <a:chExt cx="0" cy="0"/>
+        </a:xfrm>
+      </p:grpSpPr>
+      <p:pic>
+        <p:nvPicPr>
+          <p:cNvPr id="4" name="Picture 3">
+            <a:extLst>
+              <a:ext uri="{FF2B5EF4-FFF2-40B4-BE49-F238E27FC236}">
+                <a16:creationId xmlns:a16="http://schemas.microsoft.com/office/drawing/2014/main" id="{6525F2C9-1A61-62B6-6072-4E5B7ECFE8DE}"/>
+              </a:ext>
+            </a:extLst>
+          </p:cNvPr>
+          <p:cNvPicPr>
+            <a:picLocks noChangeAspect="1"/>
+          </p:cNvPicPr>
+          <p:nvPr/>
+        </p:nvPicPr>
+        <p:blipFill>
+          <a:blip r:embed="rId2"/>
+          <a:stretch>
+            <a:fillRect/>
+          </a:stretch>
+        </p:blipFill>
+        <p:spPr>
+          <a:xfrm>
+            <a:off x="5011751" y="4455636"/>
+            <a:ext cx="4113008" cy="1945164"/>
+          </a:xfrm>
+          <a:prstGeom prst="rect">
+            <a:avLst/>
+          </a:prstGeom>
+        </p:spPr>
+      </p:pic>
+      <p:sp>
+        <p:nvSpPr>
+          <p:cNvPr id="3" name="Title 2">
+            <a:extLst>
+              <a:ext uri="{FF2B5EF4-FFF2-40B4-BE49-F238E27FC236}">
+                <a16:creationId xmlns:a16="http://schemas.microsoft.com/office/drawing/2014/main" id="{F37424C4-8BCC-814E-FBDC-765A6631D733}"/>
+              </a:ext>
+            </a:extLst>
+          </p:cNvPr>
+          <p:cNvSpPr>
+            <a:spLocks noGrp="1"/>
+          </p:cNvSpPr>
+          <p:nvPr>
+            <p:ph type="title"/>
+          </p:nvPr>
+        </p:nvSpPr>
+        <p:spPr/>
+        <p:txBody>
+          <a:bodyPr/>
+          <a:lstStyle/>
+          <a:p>
+            <a:r>
+              <a:rPr lang="en-US" dirty="0"/>
+              <a:t>SBI: </a:t>
+            </a:r>
+            <a:r>
+              <a:rPr lang="en-US" dirty="0">
+                <a:solidFill>
+                  <a:schemeClr val="accent1"/>
+                </a:solidFill>
+              </a:rPr>
+              <a:t>Introduction</a:t>
+            </a:r>
+          </a:p>
+        </p:txBody>
+      </p:sp>
+      <mc:AlternateContent xmlns:mc="http://schemas.openxmlformats.org/markup-compatibility/2006" xmlns:a14="http://schemas.microsoft.com/office/drawing/2010/main">
+        <mc:Choice Requires="a14">
+          <p:sp>
+            <p:nvSpPr>
+              <p:cNvPr id="10" name="Content Placeholder 9">
+                <a:extLst>
+                  <a:ext uri="{FF2B5EF4-FFF2-40B4-BE49-F238E27FC236}">
+                    <a16:creationId xmlns:a16="http://schemas.microsoft.com/office/drawing/2014/main" id="{3813272D-D487-A9AF-0F95-B7A3A5544C44}"/>
+                  </a:ext>
+                </a:extLst>
+              </p:cNvPr>
+              <p:cNvSpPr>
+                <a:spLocks noGrp="1"/>
+              </p:cNvSpPr>
+              <p:nvPr>
+                <p:ph idx="1"/>
+              </p:nvPr>
+            </p:nvSpPr>
+            <p:spPr/>
+            <p:txBody>
+              <a:bodyPr/>
+              <a:lstStyle/>
+              <a:p>
+                <a:r>
+                  <a:rPr lang="en-US" dirty="0">
+                    <a:latin typeface="Times New Roman" panose="02020603050405020304" pitchFamily="18" charset="0"/>
+                    <a:cs typeface="Times New Roman" panose="02020603050405020304" pitchFamily="18" charset="0"/>
+                  </a:rPr>
+                  <a:t>The key technical task is approximating either the </a:t>
+                </a:r>
+                <a:r>
+                  <a:rPr lang="en-US" i="1" dirty="0">
+                    <a:latin typeface="Times New Roman" panose="02020603050405020304" pitchFamily="18" charset="0"/>
+                    <a:cs typeface="Times New Roman" panose="02020603050405020304" pitchFamily="18" charset="0"/>
+                  </a:rPr>
+                  <a:t>p-value</a:t>
+                </a:r>
+                <a:r>
+                  <a:rPr lang="en-US" dirty="0">
+                    <a:latin typeface="Times New Roman" panose="02020603050405020304" pitchFamily="18" charset="0"/>
+                    <a:cs typeface="Times New Roman" panose="02020603050405020304" pitchFamily="18" charset="0"/>
+                  </a:rPr>
+                  <a:t> </a:t>
+                </a:r>
+                <a:br>
+                  <a:rPr lang="en-US" dirty="0">
+                    <a:latin typeface="Times New Roman" panose="02020603050405020304" pitchFamily="18" charset="0"/>
+                    <a:cs typeface="Times New Roman" panose="02020603050405020304" pitchFamily="18" charset="0"/>
+                  </a:rPr>
+                </a:br>
+                <a:br>
+                  <a:rPr lang="en-US" dirty="0">
+                    <a:latin typeface="Times New Roman" panose="02020603050405020304" pitchFamily="18" charset="0"/>
+                    <a:cs typeface="Times New Roman" panose="02020603050405020304" pitchFamily="18" charset="0"/>
+                  </a:rPr>
+                </a:br>
+                <a14:m>
+                  <m:oMath xmlns:m="http://schemas.openxmlformats.org/officeDocument/2006/math">
+                    <m:r>
+                      <a:rPr lang="en-US" b="0" i="1" smtClean="0">
+                        <a:solidFill>
+                          <a:schemeClr val="tx1"/>
+                        </a:solidFill>
+                        <a:latin typeface="Cambria Math" panose="02040503050406030204" pitchFamily="18" charset="0"/>
+                        <a:cs typeface="Times New Roman" panose="02020603050405020304" pitchFamily="18" charset="0"/>
+                      </a:rPr>
+                      <m:t>𝑝</m:t>
+                    </m:r>
+                    <m:r>
+                      <a:rPr lang="en-US" b="0" i="1" smtClean="0">
+                        <a:solidFill>
+                          <a:schemeClr val="tx1"/>
+                        </a:solidFill>
+                        <a:latin typeface="Cambria Math" panose="02040503050406030204" pitchFamily="18" charset="0"/>
+                        <a:cs typeface="Times New Roman" panose="02020603050405020304" pitchFamily="18" charset="0"/>
+                      </a:rPr>
+                      <m:t>=</m:t>
+                    </m:r>
+                    <m:r>
+                      <a:rPr lang="en-US" b="0" i="1" smtClean="0">
+                        <a:solidFill>
+                          <a:schemeClr val="tx1"/>
+                        </a:solidFill>
+                        <a:latin typeface="Cambria Math" panose="02040503050406030204" pitchFamily="18" charset="0"/>
+                        <a:cs typeface="Times New Roman" panose="02020603050405020304" pitchFamily="18" charset="0"/>
+                      </a:rPr>
+                      <m:t>𝑃</m:t>
+                    </m:r>
+                    <m:r>
+                      <a:rPr lang="en-US" b="0" i="1" smtClean="0">
+                        <a:solidFill>
+                          <a:schemeClr val="tx1"/>
+                        </a:solidFill>
+                        <a:latin typeface="Cambria Math" panose="02040503050406030204" pitchFamily="18" charset="0"/>
+                        <a:cs typeface="Times New Roman" panose="02020603050405020304" pitchFamily="18" charset="0"/>
+                      </a:rPr>
+                      <m:t>(</m:t>
+                    </m:r>
+                    <m:r>
+                      <a:rPr lang="en-US" b="0" i="1" smtClean="0">
+                        <a:solidFill>
+                          <a:schemeClr val="tx1"/>
+                        </a:solidFill>
+                        <a:latin typeface="Cambria Math" panose="02040503050406030204" pitchFamily="18" charset="0"/>
+                        <a:cs typeface="Times New Roman" panose="02020603050405020304" pitchFamily="18" charset="0"/>
+                      </a:rPr>
+                      <m:t>𝜆</m:t>
+                    </m:r>
+                    <m:r>
+                      <a:rPr lang="en-US" b="0" i="1" smtClean="0">
+                        <a:solidFill>
+                          <a:schemeClr val="tx1"/>
+                        </a:solidFill>
+                        <a:latin typeface="Cambria Math" panose="02040503050406030204" pitchFamily="18" charset="0"/>
+                        <a:cs typeface="Times New Roman" panose="02020603050405020304" pitchFamily="18" charset="0"/>
+                      </a:rPr>
+                      <m:t>&gt;</m:t>
+                    </m:r>
+                    <m:sSub>
+                      <m:sSubPr>
+                        <m:ctrlPr>
+                          <a:rPr lang="en-US" b="0" i="1" smtClean="0">
+                            <a:solidFill>
+                              <a:schemeClr val="tx1"/>
+                            </a:solidFill>
+                            <a:latin typeface="Cambria Math" panose="02040503050406030204" pitchFamily="18" charset="0"/>
+                            <a:cs typeface="Times New Roman" panose="02020603050405020304" pitchFamily="18" charset="0"/>
+                          </a:rPr>
+                        </m:ctrlPr>
+                      </m:sSubPr>
+                      <m:e>
+                        <m:r>
+                          <a:rPr lang="en-US" b="0" i="1" smtClean="0">
+                            <a:solidFill>
+                              <a:schemeClr val="tx1"/>
+                            </a:solidFill>
+                            <a:latin typeface="Cambria Math" panose="02040503050406030204" pitchFamily="18" charset="0"/>
+                            <a:cs typeface="Times New Roman" panose="02020603050405020304" pitchFamily="18" charset="0"/>
+                          </a:rPr>
+                          <m:t>𝜆</m:t>
+                        </m:r>
+                      </m:e>
+                      <m:sub>
+                        <m:r>
+                          <a:rPr lang="en-US" b="0" i="1" smtClean="0">
+                            <a:solidFill>
+                              <a:schemeClr val="tx1"/>
+                            </a:solidFill>
+                            <a:latin typeface="Cambria Math" panose="02040503050406030204" pitchFamily="18" charset="0"/>
+                            <a:cs typeface="Times New Roman" panose="02020603050405020304" pitchFamily="18" charset="0"/>
+                          </a:rPr>
+                          <m:t>𝐷</m:t>
+                        </m:r>
+                      </m:sub>
+                    </m:sSub>
+                    <m:r>
+                      <a:rPr lang="en-US" b="0" i="1" smtClean="0">
+                        <a:solidFill>
+                          <a:schemeClr val="tx1"/>
+                        </a:solidFill>
+                        <a:latin typeface="Cambria Math" panose="02040503050406030204" pitchFamily="18" charset="0"/>
+                        <a:cs typeface="Times New Roman" panose="02020603050405020304" pitchFamily="18" charset="0"/>
+                      </a:rPr>
+                      <m:t>|</m:t>
+                    </m:r>
+                    <m:r>
+                      <a:rPr lang="en-US" b="0" i="1" smtClean="0">
+                        <a:solidFill>
+                          <a:schemeClr val="tx1"/>
+                        </a:solidFill>
+                        <a:latin typeface="Cambria Math" panose="02040503050406030204" pitchFamily="18" charset="0"/>
+                        <a:cs typeface="Times New Roman" panose="02020603050405020304" pitchFamily="18" charset="0"/>
+                      </a:rPr>
+                      <m:t>𝜃</m:t>
+                    </m:r>
+                    <m:r>
+                      <a:rPr lang="en-US" b="0" i="1" smtClean="0">
+                        <a:solidFill>
+                          <a:schemeClr val="tx1"/>
+                        </a:solidFill>
+                        <a:latin typeface="Cambria Math" panose="02040503050406030204" pitchFamily="18" charset="0"/>
+                        <a:cs typeface="Times New Roman" panose="02020603050405020304" pitchFamily="18" charset="0"/>
+                      </a:rPr>
+                      <m:t>)</m:t>
+                    </m:r>
+                  </m:oMath>
+                </a14:m>
+                <a:r>
+                  <a:rPr lang="en-US" dirty="0">
+                    <a:solidFill>
+                      <a:schemeClr val="tx1"/>
+                    </a:solidFill>
+                    <a:latin typeface="Times New Roman" panose="02020603050405020304" pitchFamily="18" charset="0"/>
+                    <a:cs typeface="Times New Roman" panose="02020603050405020304" pitchFamily="18" charset="0"/>
+                  </a:rPr>
+                  <a:t>, </a:t>
+                </a:r>
+                <a:br>
+                  <a:rPr lang="en-US" dirty="0">
+                    <a:latin typeface="Times New Roman" panose="02020603050405020304" pitchFamily="18" charset="0"/>
+                    <a:cs typeface="Times New Roman" panose="02020603050405020304" pitchFamily="18" charset="0"/>
+                  </a:rPr>
+                </a:br>
+                <a:br>
+                  <a:rPr lang="en-US" dirty="0">
+                    <a:latin typeface="Times New Roman" panose="02020603050405020304" pitchFamily="18" charset="0"/>
+                    <a:cs typeface="Times New Roman" panose="02020603050405020304" pitchFamily="18" charset="0"/>
+                  </a:rPr>
+                </a:br>
+                <a:r>
+                  <a:rPr lang="en-US" dirty="0">
+                    <a:latin typeface="Times New Roman" panose="02020603050405020304" pitchFamily="18" charset="0"/>
+                    <a:cs typeface="Times New Roman" panose="02020603050405020304" pitchFamily="18" charset="0"/>
+                  </a:rPr>
+                  <a:t>or, equivalently, the </a:t>
+                </a:r>
+                <a:r>
+                  <a:rPr lang="en-US" i="1" dirty="0">
+                    <a:latin typeface="Times New Roman" panose="02020603050405020304" pitchFamily="18" charset="0"/>
+                    <a:cs typeface="Times New Roman" panose="02020603050405020304" pitchFamily="18" charset="0"/>
+                  </a:rPr>
+                  <a:t>cumulative density function </a:t>
+                </a:r>
+                <a:r>
+                  <a:rPr lang="en-US" dirty="0">
+                    <a:latin typeface="Times New Roman" panose="02020603050405020304" pitchFamily="18" charset="0"/>
+                    <a:cs typeface="Times New Roman" panose="02020603050405020304" pitchFamily="18" charset="0"/>
+                  </a:rPr>
+                  <a:t>(</a:t>
+                </a:r>
+                <a:r>
+                  <a:rPr lang="en-US" dirty="0" err="1">
+                    <a:latin typeface="Times New Roman" panose="02020603050405020304" pitchFamily="18" charset="0"/>
+                    <a:cs typeface="Times New Roman" panose="02020603050405020304" pitchFamily="18" charset="0"/>
+                  </a:rPr>
+                  <a:t>cdf</a:t>
+                </a:r>
+                <a:r>
+                  <a:rPr lang="en-US" dirty="0">
+                    <a:latin typeface="Times New Roman" panose="02020603050405020304" pitchFamily="18" charset="0"/>
+                    <a:cs typeface="Times New Roman" panose="02020603050405020304" pitchFamily="18" charset="0"/>
+                  </a:rPr>
+                  <a:t>) </a:t>
+                </a:r>
+                <a:br>
+                  <a:rPr lang="en-US" dirty="0">
+                    <a:latin typeface="Times New Roman" panose="02020603050405020304" pitchFamily="18" charset="0"/>
+                    <a:cs typeface="Times New Roman" panose="02020603050405020304" pitchFamily="18" charset="0"/>
+                  </a:rPr>
+                </a:br>
+                <a:br>
+                  <a:rPr lang="en-US" dirty="0">
+                    <a:latin typeface="Times New Roman" panose="02020603050405020304" pitchFamily="18" charset="0"/>
+                    <a:cs typeface="Times New Roman" panose="02020603050405020304" pitchFamily="18" charset="0"/>
+                  </a:rPr>
+                </a:br>
+                <a14:m>
+                  <m:oMath xmlns:m="http://schemas.openxmlformats.org/officeDocument/2006/math">
+                    <m:r>
+                      <a:rPr lang="en-US" b="0" i="1" smtClean="0">
+                        <a:solidFill>
+                          <a:schemeClr val="tx1"/>
+                        </a:solidFill>
+                        <a:latin typeface="Cambria Math" panose="02040503050406030204" pitchFamily="18" charset="0"/>
+                        <a:cs typeface="Times New Roman" panose="02020603050405020304" pitchFamily="18" charset="0"/>
+                      </a:rPr>
+                      <m:t>𝐶</m:t>
+                    </m:r>
+                    <m:d>
+                      <m:dPr>
+                        <m:ctrlPr>
+                          <a:rPr lang="en-US" b="0" i="1" smtClean="0">
+                            <a:solidFill>
+                              <a:schemeClr val="tx1"/>
+                            </a:solidFill>
+                            <a:latin typeface="Cambria Math" panose="02040503050406030204" pitchFamily="18" charset="0"/>
+                            <a:cs typeface="Times New Roman" panose="02020603050405020304" pitchFamily="18" charset="0"/>
+                          </a:rPr>
+                        </m:ctrlPr>
+                      </m:dPr>
+                      <m:e>
+                        <m:sSub>
+                          <m:sSubPr>
+                            <m:ctrlPr>
+                              <a:rPr lang="en-US" b="0" i="1" smtClean="0">
+                                <a:solidFill>
+                                  <a:schemeClr val="tx1"/>
+                                </a:solidFill>
+                                <a:latin typeface="Cambria Math" panose="02040503050406030204" pitchFamily="18" charset="0"/>
+                                <a:cs typeface="Times New Roman" panose="02020603050405020304" pitchFamily="18" charset="0"/>
+                              </a:rPr>
+                            </m:ctrlPr>
+                          </m:sSubPr>
+                          <m:e>
+                            <m:r>
+                              <a:rPr lang="en-US" b="0" i="1" smtClean="0">
+                                <a:solidFill>
+                                  <a:schemeClr val="tx1"/>
+                                </a:solidFill>
+                                <a:latin typeface="Cambria Math" panose="02040503050406030204" pitchFamily="18" charset="0"/>
+                                <a:cs typeface="Times New Roman" panose="02020603050405020304" pitchFamily="18" charset="0"/>
+                              </a:rPr>
+                              <m:t>𝜆</m:t>
+                            </m:r>
+                          </m:e>
+                          <m:sub>
+                            <m:r>
+                              <a:rPr lang="en-US" b="0" i="1" smtClean="0">
+                                <a:solidFill>
+                                  <a:schemeClr val="tx1"/>
+                                </a:solidFill>
+                                <a:latin typeface="Cambria Math" panose="02040503050406030204" pitchFamily="18" charset="0"/>
+                                <a:cs typeface="Times New Roman" panose="02020603050405020304" pitchFamily="18" charset="0"/>
+                              </a:rPr>
+                              <m:t>𝐷</m:t>
+                            </m:r>
+                          </m:sub>
+                        </m:sSub>
+                      </m:e>
+                      <m:e>
+                        <m:r>
+                          <a:rPr lang="en-US" b="0" i="1" smtClean="0">
+                            <a:solidFill>
+                              <a:schemeClr val="tx1"/>
+                            </a:solidFill>
+                            <a:latin typeface="Cambria Math" panose="02040503050406030204" pitchFamily="18" charset="0"/>
+                            <a:cs typeface="Times New Roman" panose="02020603050405020304" pitchFamily="18" charset="0"/>
+                          </a:rPr>
+                          <m:t>𝜃</m:t>
+                        </m:r>
+                      </m:e>
+                    </m:d>
+                    <m:r>
+                      <a:rPr lang="en-US" b="0" i="1" smtClean="0">
+                        <a:solidFill>
+                          <a:schemeClr val="tx1"/>
+                        </a:solidFill>
+                        <a:latin typeface="Cambria Math" panose="02040503050406030204" pitchFamily="18" charset="0"/>
+                        <a:cs typeface="Times New Roman" panose="02020603050405020304" pitchFamily="18" charset="0"/>
+                      </a:rPr>
+                      <m:t>≡1−</m:t>
+                    </m:r>
+                    <m:r>
+                      <a:rPr lang="en-US" b="0" i="1" smtClean="0">
+                        <a:solidFill>
+                          <a:schemeClr val="tx1"/>
+                        </a:solidFill>
+                        <a:latin typeface="Cambria Math" panose="02040503050406030204" pitchFamily="18" charset="0"/>
+                        <a:cs typeface="Times New Roman" panose="02020603050405020304" pitchFamily="18" charset="0"/>
+                      </a:rPr>
+                      <m:t>𝑝</m:t>
+                    </m:r>
+                    <m:r>
+                      <a:rPr lang="en-US" b="0" i="1" smtClean="0">
+                        <a:solidFill>
+                          <a:schemeClr val="tx1"/>
+                        </a:solidFill>
+                        <a:latin typeface="Cambria Math" panose="02040503050406030204" pitchFamily="18" charset="0"/>
+                        <a:cs typeface="Times New Roman" panose="02020603050405020304" pitchFamily="18" charset="0"/>
+                      </a:rPr>
+                      <m:t>=</m:t>
+                    </m:r>
+                    <m:r>
+                      <a:rPr lang="en-US" b="0" i="1" smtClean="0">
+                        <a:solidFill>
+                          <a:schemeClr val="tx1"/>
+                        </a:solidFill>
+                        <a:latin typeface="Cambria Math" panose="02040503050406030204" pitchFamily="18" charset="0"/>
+                        <a:cs typeface="Times New Roman" panose="02020603050405020304" pitchFamily="18" charset="0"/>
+                      </a:rPr>
+                      <m:t>𝑃</m:t>
+                    </m:r>
+                    <m:r>
+                      <a:rPr lang="en-US" b="0" i="1" smtClean="0">
+                        <a:solidFill>
+                          <a:schemeClr val="tx1"/>
+                        </a:solidFill>
+                        <a:latin typeface="Cambria Math" panose="02040503050406030204" pitchFamily="18" charset="0"/>
+                        <a:cs typeface="Times New Roman" panose="02020603050405020304" pitchFamily="18" charset="0"/>
+                      </a:rPr>
+                      <m:t>(</m:t>
+                    </m:r>
+                    <m:r>
+                      <a:rPr lang="en-US" b="0" i="1" smtClean="0">
+                        <a:solidFill>
+                          <a:schemeClr val="tx1"/>
+                        </a:solidFill>
+                        <a:latin typeface="Cambria Math" panose="02040503050406030204" pitchFamily="18" charset="0"/>
+                        <a:cs typeface="Times New Roman" panose="02020603050405020304" pitchFamily="18" charset="0"/>
+                      </a:rPr>
+                      <m:t>𝜆</m:t>
+                    </m:r>
+                    <m:r>
+                      <a:rPr lang="en-US" b="0" i="1" smtClean="0">
+                        <a:solidFill>
+                          <a:schemeClr val="tx1"/>
+                        </a:solidFill>
+                        <a:latin typeface="Cambria Math" panose="02040503050406030204" pitchFamily="18" charset="0"/>
+                        <a:ea typeface="Cambria Math" panose="02040503050406030204" pitchFamily="18" charset="0"/>
+                        <a:cs typeface="Times New Roman" panose="02020603050405020304" pitchFamily="18" charset="0"/>
+                      </a:rPr>
+                      <m:t>≤</m:t>
+                    </m:r>
+                    <m:sSub>
+                      <m:sSubPr>
+                        <m:ctrlPr>
+                          <a:rPr lang="en-US" b="0" i="1" smtClean="0">
+                            <a:solidFill>
+                              <a:schemeClr val="tx1"/>
+                            </a:solidFill>
+                            <a:latin typeface="Cambria Math" panose="02040503050406030204" pitchFamily="18" charset="0"/>
+                            <a:cs typeface="Times New Roman" panose="02020603050405020304" pitchFamily="18" charset="0"/>
+                          </a:rPr>
+                        </m:ctrlPr>
+                      </m:sSubPr>
+                      <m:e>
+                        <m:r>
+                          <a:rPr lang="en-US" b="0" i="1" smtClean="0">
+                            <a:solidFill>
+                              <a:schemeClr val="tx1"/>
+                            </a:solidFill>
+                            <a:latin typeface="Cambria Math" panose="02040503050406030204" pitchFamily="18" charset="0"/>
+                            <a:cs typeface="Times New Roman" panose="02020603050405020304" pitchFamily="18" charset="0"/>
+                          </a:rPr>
+                          <m:t>𝜆</m:t>
+                        </m:r>
+                      </m:e>
+                      <m:sub>
+                        <m:r>
+                          <a:rPr lang="en-US" b="0" i="1" smtClean="0">
+                            <a:solidFill>
+                              <a:schemeClr val="tx1"/>
+                            </a:solidFill>
+                            <a:latin typeface="Cambria Math" panose="02040503050406030204" pitchFamily="18" charset="0"/>
+                            <a:cs typeface="Times New Roman" panose="02020603050405020304" pitchFamily="18" charset="0"/>
+                          </a:rPr>
+                          <m:t>𝐷</m:t>
+                        </m:r>
+                      </m:sub>
+                    </m:sSub>
+                    <m:r>
+                      <a:rPr lang="en-US" b="0" i="1" smtClean="0">
+                        <a:solidFill>
+                          <a:schemeClr val="tx1"/>
+                        </a:solidFill>
+                        <a:latin typeface="Cambria Math" panose="02040503050406030204" pitchFamily="18" charset="0"/>
+                        <a:cs typeface="Times New Roman" panose="02020603050405020304" pitchFamily="18" charset="0"/>
+                      </a:rPr>
+                      <m:t>|</m:t>
+                    </m:r>
+                    <m:r>
+                      <a:rPr lang="en-US" b="0" i="1" smtClean="0">
+                        <a:solidFill>
+                          <a:schemeClr val="tx1"/>
+                        </a:solidFill>
+                        <a:latin typeface="Cambria Math" panose="02040503050406030204" pitchFamily="18" charset="0"/>
+                        <a:cs typeface="Times New Roman" panose="02020603050405020304" pitchFamily="18" charset="0"/>
+                      </a:rPr>
+                      <m:t>𝜃</m:t>
+                    </m:r>
+                    <m:r>
+                      <a:rPr lang="en-US" b="0" i="1" smtClean="0">
+                        <a:solidFill>
+                          <a:schemeClr val="tx1"/>
+                        </a:solidFill>
+                        <a:latin typeface="Cambria Math" panose="02040503050406030204" pitchFamily="18" charset="0"/>
+                        <a:cs typeface="Times New Roman" panose="02020603050405020304" pitchFamily="18" charset="0"/>
+                      </a:rPr>
+                      <m:t>)</m:t>
+                    </m:r>
+                  </m:oMath>
+                </a14:m>
+                <a:r>
+                  <a:rPr lang="en-US" dirty="0">
+                    <a:solidFill>
+                      <a:schemeClr val="tx1"/>
+                    </a:solidFill>
+                    <a:latin typeface="Times New Roman" panose="02020603050405020304" pitchFamily="18" charset="0"/>
+                    <a:cs typeface="Times New Roman" panose="02020603050405020304" pitchFamily="18" charset="0"/>
+                  </a:rPr>
+                  <a:t>.</a:t>
+                </a:r>
+                <a:br>
+                  <a:rPr lang="en-US" dirty="0">
+                    <a:latin typeface="Times New Roman" panose="02020603050405020304" pitchFamily="18" charset="0"/>
+                    <a:cs typeface="Times New Roman" panose="02020603050405020304" pitchFamily="18" charset="0"/>
+                  </a:rPr>
+                </a:br>
+                <a:endParaRPr lang="en-US" dirty="0">
+                  <a:latin typeface="Times New Roman" panose="02020603050405020304" pitchFamily="18" charset="0"/>
+                  <a:cs typeface="Times New Roman" panose="02020603050405020304" pitchFamily="18" charset="0"/>
+                </a:endParaRPr>
+              </a:p>
+              <a:p>
+                <a:pPr marL="0" indent="0">
+                  <a:buNone/>
+                </a:pPr>
+                <a:endParaRPr lang="en-US" dirty="0">
+                  <a:latin typeface="Times New Roman" panose="02020603050405020304" pitchFamily="18" charset="0"/>
+                  <a:cs typeface="Times New Roman" panose="02020603050405020304" pitchFamily="18" charset="0"/>
+                </a:endParaRPr>
+              </a:p>
+            </p:txBody>
+          </p:sp>
+        </mc:Choice>
+        <mc:Fallback xmlns="">
+          <p:sp>
+            <p:nvSpPr>
+              <p:cNvPr id="10" name="Content Placeholder 9">
+                <a:extLst>
+                  <a:ext uri="{FF2B5EF4-FFF2-40B4-BE49-F238E27FC236}">
+                    <a16:creationId xmlns:a16="http://schemas.microsoft.com/office/drawing/2014/main" id="{3813272D-D487-A9AF-0F95-B7A3A5544C44}"/>
+                  </a:ext>
+                </a:extLst>
+              </p:cNvPr>
+              <p:cNvSpPr>
+                <a:spLocks noGrp="1" noRot="1" noChangeAspect="1" noMove="1" noResize="1" noEditPoints="1" noAdjustHandles="1" noChangeArrowheads="1" noChangeShapeType="1" noTextEdit="1"/>
+              </p:cNvSpPr>
+              <p:nvPr>
+                <p:ph idx="1"/>
+              </p:nvPr>
+            </p:nvSpPr>
+            <p:spPr>
+              <a:blipFill>
+                <a:blip r:embed="rId3"/>
+                <a:stretch>
+                  <a:fillRect l="-1142" t="-1316"/>
+                </a:stretch>
+              </a:blipFill>
+            </p:spPr>
+            <p:txBody>
+              <a:bodyPr/>
+              <a:lstStyle/>
+              <a:p>
+                <a:r>
+                  <a:rPr lang="en-US">
+                    <a:noFill/>
+                  </a:rPr>
+                  <a:t> </a:t>
+                </a:r>
+              </a:p>
+            </p:txBody>
+          </p:sp>
+        </mc:Fallback>
+      </mc:AlternateContent>
+    </p:spTree>
+    <p:extLst>
+      <p:ext uri="{BB962C8B-B14F-4D97-AF65-F5344CB8AC3E}">
+        <p14:creationId xmlns:p14="http://schemas.microsoft.com/office/powerpoint/2010/main" val="2205404216"/>
+      </p:ext>
+    </p:extLst>
+  </p:cSld>
+  <p:clrMapOvr>
+    <a:masterClrMapping/>
+  </p:clrMapOvr>
+</p:sld>
+</file>
+
+<file path=ppt/slides/slide11.xml><?xml version="1.0" encoding="utf-8"?>
+<p:sld xmlns:a="http://schemas.openxmlformats.org/drawingml/2006/main" xmlns:r="http://schemas.openxmlformats.org/officeDocument/2006/relationships" xmlns:p="http://schemas.openxmlformats.org/presentationml/2006/main">
+  <p:cSld>
+    <p:spTree>
+      <p:nvGrpSpPr>
+        <p:cNvPr id="1" name="">
+          <a:extLst>
+            <a:ext uri="{FF2B5EF4-FFF2-40B4-BE49-F238E27FC236}">
               <a16:creationId xmlns:a16="http://schemas.microsoft.com/office/drawing/2014/main" id="{B28F744D-C1D5-98C0-C128-C7F2EE83002E}"/>
             </a:ext>
           </a:extLst>
@@ -3268,7 +3916,7 @@
 </p:sld>
 </file>
 
-<file path=ppt/slides/slide11.xml><?xml version="1.0" encoding="utf-8"?>
+<file path=ppt/slides/slide12.xml><?xml version="1.0" encoding="utf-8"?>
 <p:sld xmlns:a="http://schemas.openxmlformats.org/drawingml/2006/main" xmlns:r="http://schemas.openxmlformats.org/officeDocument/2006/relationships" xmlns:p="http://schemas.openxmlformats.org/presentationml/2006/main">
   <p:cSld>
     <p:spTree>
@@ -3324,8 +3972,8 @@
           </a:p>
         </p:txBody>
       </p:sp>
-      <mc:AlternateContent xmlns:mc="http://schemas.openxmlformats.org/markup-compatibility/2006" xmlns:a14="http://schemas.microsoft.com/office/drawing/2010/main">
-        <mc:Choice Requires="a14">
+      <mc:AlternateContent xmlns:mc="http://schemas.openxmlformats.org/markup-compatibility/2006">
+        <mc:Choice xmlns:a14="http://schemas.microsoft.com/office/drawing/2010/main" Requires="a14">
           <p:sp>
             <p:nvSpPr>
               <p:cNvPr id="8" name="Content Placeholder 7">
@@ -3606,7 +4254,7 @@
                 <a14:m>
                   <m:oMath xmlns:m="http://schemas.openxmlformats.org/officeDocument/2006/math">
                     <m:r>
-                      <a:rPr lang="en-US" i="1" smtClean="0">
+                      <a:rPr lang="en-US" i="1">
                         <a:solidFill>
                           <a:srgbClr val="0033CC"/>
                         </a:solidFill>
@@ -3617,7 +4265,7 @@
                       <m:t>ℱ</m:t>
                     </m:r>
                     <m:r>
-                      <a:rPr lang="en-US" b="0" i="1" smtClean="0">
+                      <a:rPr lang="en-US" i="1">
                         <a:solidFill>
                           <a:srgbClr val="0033CC"/>
                         </a:solidFill>
@@ -3628,7 +4276,7 @@
                       <m:t>(</m:t>
                     </m:r>
                     <m:r>
-                      <a:rPr lang="en-US" b="0" i="1" smtClean="0">
+                      <a:rPr lang="en-US" i="1">
                         <a:solidFill>
                           <a:srgbClr val="0033CC"/>
                         </a:solidFill>
@@ -3639,7 +4287,7 @@
                       <m:t>𝜃</m:t>
                     </m:r>
                     <m:r>
-                      <a:rPr lang="en-US" b="0" i="1" smtClean="0">
+                      <a:rPr lang="en-US" i="1">
                         <a:solidFill>
                           <a:srgbClr val="0033CC"/>
                         </a:solidFill>
@@ -3652,16 +4300,8 @@
                   </m:oMath>
                 </a14:m>
                 <a:r>
-                  <a:rPr lang="en-US" dirty="0">
-                    <a:solidFill>
-                      <a:srgbClr val="0033CC"/>
-                    </a:solidFill>
-                  </a:rPr>
-                  <a:t> </a:t>
-                </a:r>
-                <a:r>
                   <a:rPr lang="en-US" dirty="0"/>
-                  <a:t>to simulate potential observations, </a:t>
+                  <a:t> to simulate potential observations, </a:t>
                 </a:r>
                 <a14:m>
                   <m:oMath xmlns:m="http://schemas.openxmlformats.org/officeDocument/2006/math">
@@ -3822,7 +4462,7 @@
             </p:txBody>
           </p:sp>
         </mc:Choice>
-        <mc:Fallback xmlns="">
+        <mc:Fallback>
           <p:sp>
             <p:nvSpPr>
               <p:cNvPr id="8" name="Content Placeholder 7">
@@ -3884,327 +4524,10 @@
       </p:transition>
     </mc:Fallback>
   </mc:AlternateContent>
-  <p:timing>
-    <p:tnLst>
-      <p:par>
-        <p:cTn id="1" dur="indefinite" restart="never" nodeType="tmRoot">
-          <p:childTnLst>
-            <p:seq concurrent="1" nextAc="seek">
-              <p:cTn id="2" dur="indefinite" nodeType="mainSeq">
-                <p:childTnLst>
-                  <p:par>
-                    <p:cTn id="3" fill="hold">
-                      <p:stCondLst>
-                        <p:cond delay="indefinite"/>
-                      </p:stCondLst>
-                      <p:childTnLst>
-                        <p:par>
-                          <p:cTn id="4" fill="hold">
-                            <p:stCondLst>
-                              <p:cond delay="0"/>
-                            </p:stCondLst>
-                            <p:childTnLst>
-                              <p:par>
-                                <p:cTn id="5" presetID="10" presetClass="entr" presetSubtype="0" fill="hold" nodeType="clickEffect">
-                                  <p:stCondLst>
-                                    <p:cond delay="0"/>
-                                  </p:stCondLst>
-                                  <p:childTnLst>
-                                    <p:set>
-                                      <p:cBhvr>
-                                        <p:cTn id="6" dur="1" fill="hold">
-                                          <p:stCondLst>
-                                            <p:cond delay="0"/>
-                                          </p:stCondLst>
-                                        </p:cTn>
-                                        <p:tgtEl>
-                                          <p:spTgt spid="8">
-                                            <p:txEl>
-                                              <p:pRg st="2" end="2"/>
-                                            </p:txEl>
-                                          </p:spTgt>
-                                        </p:tgtEl>
-                                        <p:attrNameLst>
-                                          <p:attrName>style.visibility</p:attrName>
-                                        </p:attrNameLst>
-                                      </p:cBhvr>
-                                      <p:to>
-                                        <p:strVal val="visible"/>
-                                      </p:to>
-                                    </p:set>
-                                    <p:animEffect transition="in" filter="fade">
-                                      <p:cBhvr>
-                                        <p:cTn id="7" dur="500"/>
-                                        <p:tgtEl>
-                                          <p:spTgt spid="8">
-                                            <p:txEl>
-                                              <p:pRg st="2" end="2"/>
-                                            </p:txEl>
-                                          </p:spTgt>
-                                        </p:tgtEl>
-                                      </p:cBhvr>
-                                    </p:animEffect>
-                                  </p:childTnLst>
-                                </p:cTn>
-                              </p:par>
-                            </p:childTnLst>
-                          </p:cTn>
-                        </p:par>
-                      </p:childTnLst>
-                    </p:cTn>
-                  </p:par>
-                  <p:par>
-                    <p:cTn id="8" fill="hold">
-                      <p:stCondLst>
-                        <p:cond delay="indefinite"/>
-                      </p:stCondLst>
-                      <p:childTnLst>
-                        <p:par>
-                          <p:cTn id="9" fill="hold">
-                            <p:stCondLst>
-                              <p:cond delay="0"/>
-                            </p:stCondLst>
-                            <p:childTnLst>
-                              <p:par>
-                                <p:cTn id="10" presetID="10" presetClass="entr" presetSubtype="0" fill="hold" nodeType="clickEffect">
-                                  <p:stCondLst>
-                                    <p:cond delay="0"/>
-                                  </p:stCondLst>
-                                  <p:childTnLst>
-                                    <p:set>
-                                      <p:cBhvr>
-                                        <p:cTn id="11" dur="1" fill="hold">
-                                          <p:stCondLst>
-                                            <p:cond delay="0"/>
-                                          </p:stCondLst>
-                                        </p:cTn>
-                                        <p:tgtEl>
-                                          <p:spTgt spid="8">
-                                            <p:txEl>
-                                              <p:pRg st="3" end="3"/>
-                                            </p:txEl>
-                                          </p:spTgt>
-                                        </p:tgtEl>
-                                        <p:attrNameLst>
-                                          <p:attrName>style.visibility</p:attrName>
-                                        </p:attrNameLst>
-                                      </p:cBhvr>
-                                      <p:to>
-                                        <p:strVal val="visible"/>
-                                      </p:to>
-                                    </p:set>
-                                    <p:animEffect transition="in" filter="fade">
-                                      <p:cBhvr>
-                                        <p:cTn id="12" dur="500"/>
-                                        <p:tgtEl>
-                                          <p:spTgt spid="8">
-                                            <p:txEl>
-                                              <p:pRg st="3" end="3"/>
-                                            </p:txEl>
-                                          </p:spTgt>
-                                        </p:tgtEl>
-                                      </p:cBhvr>
-                                    </p:animEffect>
-                                  </p:childTnLst>
-                                </p:cTn>
-                              </p:par>
-                              <p:par>
-                                <p:cTn id="13" presetID="10" presetClass="entr" presetSubtype="0" fill="hold" nodeType="withEffect">
-                                  <p:stCondLst>
-                                    <p:cond delay="0"/>
-                                  </p:stCondLst>
-                                  <p:childTnLst>
-                                    <p:set>
-                                      <p:cBhvr>
-                                        <p:cTn id="14" dur="1" fill="hold">
-                                          <p:stCondLst>
-                                            <p:cond delay="0"/>
-                                          </p:stCondLst>
-                                        </p:cTn>
-                                        <p:tgtEl>
-                                          <p:spTgt spid="8">
-                                            <p:txEl>
-                                              <p:pRg st="4" end="4"/>
-                                            </p:txEl>
-                                          </p:spTgt>
-                                        </p:tgtEl>
-                                        <p:attrNameLst>
-                                          <p:attrName>style.visibility</p:attrName>
-                                        </p:attrNameLst>
-                                      </p:cBhvr>
-                                      <p:to>
-                                        <p:strVal val="visible"/>
-                                      </p:to>
-                                    </p:set>
-                                    <p:animEffect transition="in" filter="fade">
-                                      <p:cBhvr>
-                                        <p:cTn id="15" dur="500"/>
-                                        <p:tgtEl>
-                                          <p:spTgt spid="8">
-                                            <p:txEl>
-                                              <p:pRg st="4" end="4"/>
-                                            </p:txEl>
-                                          </p:spTgt>
-                                        </p:tgtEl>
-                                      </p:cBhvr>
-                                    </p:animEffect>
-                                  </p:childTnLst>
-                                </p:cTn>
-                              </p:par>
-                            </p:childTnLst>
-                          </p:cTn>
-                        </p:par>
-                      </p:childTnLst>
-                    </p:cTn>
-                  </p:par>
-                  <p:par>
-                    <p:cTn id="16" fill="hold">
-                      <p:stCondLst>
-                        <p:cond delay="indefinite"/>
-                      </p:stCondLst>
-                      <p:childTnLst>
-                        <p:par>
-                          <p:cTn id="17" fill="hold">
-                            <p:stCondLst>
-                              <p:cond delay="0"/>
-                            </p:stCondLst>
-                            <p:childTnLst>
-                              <p:par>
-                                <p:cTn id="18" presetID="10" presetClass="entr" presetSubtype="0" fill="hold" nodeType="clickEffect">
-                                  <p:stCondLst>
-                                    <p:cond delay="0"/>
-                                  </p:stCondLst>
-                                  <p:childTnLst>
-                                    <p:set>
-                                      <p:cBhvr>
-                                        <p:cTn id="19" dur="1" fill="hold">
-                                          <p:stCondLst>
-                                            <p:cond delay="0"/>
-                                          </p:stCondLst>
-                                        </p:cTn>
-                                        <p:tgtEl>
-                                          <p:spTgt spid="8">
-                                            <p:txEl>
-                                              <p:pRg st="5" end="5"/>
-                                            </p:txEl>
-                                          </p:spTgt>
-                                        </p:tgtEl>
-                                        <p:attrNameLst>
-                                          <p:attrName>style.visibility</p:attrName>
-                                        </p:attrNameLst>
-                                      </p:cBhvr>
-                                      <p:to>
-                                        <p:strVal val="visible"/>
-                                      </p:to>
-                                    </p:set>
-                                    <p:animEffect transition="in" filter="fade">
-                                      <p:cBhvr>
-                                        <p:cTn id="20" dur="500"/>
-                                        <p:tgtEl>
-                                          <p:spTgt spid="8">
-                                            <p:txEl>
-                                              <p:pRg st="5" end="5"/>
-                                            </p:txEl>
-                                          </p:spTgt>
-                                        </p:tgtEl>
-                                      </p:cBhvr>
-                                    </p:animEffect>
-                                  </p:childTnLst>
-                                </p:cTn>
-                              </p:par>
-                            </p:childTnLst>
-                          </p:cTn>
-                        </p:par>
-                      </p:childTnLst>
-                    </p:cTn>
-                  </p:par>
-                  <p:par>
-                    <p:cTn id="21" fill="hold">
-                      <p:stCondLst>
-                        <p:cond delay="indefinite"/>
-                      </p:stCondLst>
-                      <p:childTnLst>
-                        <p:par>
-                          <p:cTn id="22" fill="hold">
-                            <p:stCondLst>
-                              <p:cond delay="0"/>
-                            </p:stCondLst>
-                            <p:childTnLst>
-                              <p:par>
-                                <p:cTn id="23" presetID="10" presetClass="entr" presetSubtype="0" fill="hold" nodeType="clickEffect">
-                                  <p:stCondLst>
-                                    <p:cond delay="0"/>
-                                  </p:stCondLst>
-                                  <p:childTnLst>
-                                    <p:set>
-                                      <p:cBhvr>
-                                        <p:cTn id="24" dur="1" fill="hold">
-                                          <p:stCondLst>
-                                            <p:cond delay="0"/>
-                                          </p:stCondLst>
-                                        </p:cTn>
-                                        <p:tgtEl>
-                                          <p:spTgt spid="8">
-                                            <p:txEl>
-                                              <p:pRg st="6" end="6"/>
-                                            </p:txEl>
-                                          </p:spTgt>
-                                        </p:tgtEl>
-                                        <p:attrNameLst>
-                                          <p:attrName>style.visibility</p:attrName>
-                                        </p:attrNameLst>
-                                      </p:cBhvr>
-                                      <p:to>
-                                        <p:strVal val="visible"/>
-                                      </p:to>
-                                    </p:set>
-                                    <p:animEffect transition="in" filter="fade">
-                                      <p:cBhvr>
-                                        <p:cTn id="25" dur="500"/>
-                                        <p:tgtEl>
-                                          <p:spTgt spid="8">
-                                            <p:txEl>
-                                              <p:pRg st="6" end="6"/>
-                                            </p:txEl>
-                                          </p:spTgt>
-                                        </p:tgtEl>
-                                      </p:cBhvr>
-                                    </p:animEffect>
-                                  </p:childTnLst>
-                                </p:cTn>
-                              </p:par>
-                            </p:childTnLst>
-                          </p:cTn>
-                        </p:par>
-                      </p:childTnLst>
-                    </p:cTn>
-                  </p:par>
-                </p:childTnLst>
-              </p:cTn>
-              <p:prevCondLst>
-                <p:cond evt="onPrev" delay="0">
-                  <p:tgtEl>
-                    <p:sldTgt/>
-                  </p:tgtEl>
-                </p:cond>
-              </p:prevCondLst>
-              <p:nextCondLst>
-                <p:cond evt="onNext" delay="0">
-                  <p:tgtEl>
-                    <p:sldTgt/>
-                  </p:tgtEl>
-                </p:cond>
-              </p:nextCondLst>
-            </p:seq>
-          </p:childTnLst>
-        </p:cTn>
-      </p:par>
-    </p:tnLst>
-  </p:timing>
 </p:sld>
 </file>
 
-<file path=ppt/slides/slide12.xml><?xml version="1.0" encoding="utf-8"?>
+<file path=ppt/slides/slide13.xml><?xml version="1.0" encoding="utf-8"?>
 <p:sld xmlns:a="http://schemas.openxmlformats.org/drawingml/2006/main" xmlns:r="http://schemas.openxmlformats.org/officeDocument/2006/relationships" xmlns:p="http://schemas.openxmlformats.org/presentationml/2006/main">
   <p:cSld>
     <p:spTree>
@@ -4263,8 +4586,8 @@
           </a:p>
         </p:txBody>
       </p:sp>
-      <mc:AlternateContent xmlns:mc="http://schemas.openxmlformats.org/markup-compatibility/2006" xmlns:a14="http://schemas.microsoft.com/office/drawing/2010/main">
-        <mc:Choice Requires="a14">
+      <mc:AlternateContent xmlns:mc="http://schemas.openxmlformats.org/markup-compatibility/2006">
+        <mc:Choice xmlns:a14="http://schemas.microsoft.com/office/drawing/2010/main" Requires="a14">
           <p:sp>
             <p:nvSpPr>
               <p:cNvPr id="8" name="Content Placeholder 7">
@@ -4366,49 +4689,6 @@
                         </m:ctrlPr>
                       </m:sSubPr>
                       <m:e>
-                        <m:r>
-                          <a:rPr lang="en-US" sz="2000" b="0" i="1" smtClean="0">
-                            <a:solidFill>
-                              <a:srgbClr val="0033CC"/>
-                            </a:solidFill>
-                            <a:latin typeface="Cambria Math" panose="02040503050406030204" pitchFamily="18" charset="0"/>
-                          </a:rPr>
-                          <m:t>𝜆</m:t>
-                        </m:r>
-                      </m:e>
-                      <m:sub>
-                        <m:r>
-                          <a:rPr lang="en-US" sz="2000" b="0" i="1" smtClean="0">
-                            <a:solidFill>
-                              <a:srgbClr val="0033CC"/>
-                            </a:solidFill>
-                            <a:latin typeface="Cambria Math" panose="02040503050406030204" pitchFamily="18" charset="0"/>
-                          </a:rPr>
-                          <m:t>𝐷</m:t>
-                        </m:r>
-                      </m:sub>
-                    </m:sSub>
-                    <m:sSub>
-                      <m:sSubPr>
-                        <m:ctrlPr>
-                          <a:rPr lang="en-US" sz="2000" b="0" i="1" smtClean="0">
-                            <a:solidFill>
-                              <a:srgbClr val="0033CC"/>
-                            </a:solidFill>
-                            <a:latin typeface="Cambria Math" panose="02040503050406030204" pitchFamily="18" charset="0"/>
-                          </a:rPr>
-                        </m:ctrlPr>
-                      </m:sSubPr>
-                      <m:e>
-                        <m:r>
-                          <a:rPr lang="en-US" sz="2000" b="0" i="1" smtClean="0">
-                            <a:solidFill>
-                              <a:srgbClr val="0033CC"/>
-                            </a:solidFill>
-                            <a:latin typeface="Cambria Math" panose="02040503050406030204" pitchFamily="18" charset="0"/>
-                          </a:rPr>
-                          <m:t>, </m:t>
-                        </m:r>
                         <m:r>
                           <a:rPr lang="en-US" sz="2000" b="0" i="1" smtClean="0">
                             <a:solidFill>
@@ -4814,7 +5094,7 @@
             </p:txBody>
           </p:sp>
         </mc:Choice>
-        <mc:Fallback xmlns="">
+        <mc:Fallback>
           <p:sp>
             <p:nvSpPr>
               <p:cNvPr id="8" name="Content Placeholder 7">
@@ -4920,7 +5200,7 @@
 </p:sld>
 </file>
 
-<file path=ppt/slides/slide13.xml><?xml version="1.0" encoding="utf-8"?>
+<file path=ppt/slides/slide14.xml><?xml version="1.0" encoding="utf-8"?>
 <p:sld xmlns:a="http://schemas.openxmlformats.org/drawingml/2006/main" xmlns:r="http://schemas.openxmlformats.org/officeDocument/2006/relationships" xmlns:p="http://schemas.openxmlformats.org/presentationml/2006/main">
   <p:cSld>
     <p:spTree>
@@ -5325,7 +5605,7 @@
 </p:sld>
 </file>
 
-<file path=ppt/slides/slide14.xml><?xml version="1.0" encoding="utf-8"?>
+<file path=ppt/slides/slide15.xml><?xml version="1.0" encoding="utf-8"?>
 <p:sld xmlns:a="http://schemas.openxmlformats.org/drawingml/2006/main" xmlns:r="http://schemas.openxmlformats.org/officeDocument/2006/relationships" xmlns:p="http://schemas.openxmlformats.org/presentationml/2006/main">
   <p:cSld>
     <p:spTree>
@@ -6177,7 +6457,7 @@
 </p:sld>
 </file>
 
-<file path=ppt/slides/slide15.xml><?xml version="1.0" encoding="utf-8"?>
+<file path=ppt/slides/slide16.xml><?xml version="1.0" encoding="utf-8"?>
 <p:sld xmlns:a="http://schemas.openxmlformats.org/drawingml/2006/main" xmlns:r="http://schemas.openxmlformats.org/officeDocument/2006/relationships" xmlns:p="http://schemas.openxmlformats.org/presentationml/2006/main">
   <p:cSld>
     <p:spTree>
@@ -6249,8 +6529,8 @@
           </a:p>
         </p:txBody>
       </p:sp>
-      <mc:AlternateContent xmlns:mc="http://schemas.openxmlformats.org/markup-compatibility/2006" xmlns:a14="http://schemas.microsoft.com/office/drawing/2010/main">
-        <mc:Choice Requires="a14">
+      <mc:AlternateContent xmlns:mc="http://schemas.openxmlformats.org/markup-compatibility/2006">
+        <mc:Choice xmlns:a14="http://schemas.microsoft.com/office/drawing/2010/main" Requires="a14">
           <p:sp>
             <p:nvSpPr>
               <p:cNvPr id="8" name="Content Placeholder 7">
@@ -6480,7 +6760,7 @@
                 </a:r>
                 <a:r>
                   <a:rPr lang="en-US" dirty="0"/>
-                  <a:t>(not to be confused with the hypothesis symbol) and the dimensionless parameter </a:t>
+                  <a:t>(not to be confused with the hypothesis symbol!) and the dimensionless parameter </a:t>
                 </a:r>
                 <a14:m>
                   <m:oMath xmlns:m="http://schemas.openxmlformats.org/officeDocument/2006/math">
@@ -6567,7 +6847,7 @@
             </p:txBody>
           </p:sp>
         </mc:Choice>
-        <mc:Fallback xmlns="">
+        <mc:Fallback>
           <p:sp>
             <p:nvSpPr>
               <p:cNvPr id="8" name="Content Placeholder 7">
@@ -6795,7 +7075,7 @@
 </p:sld>
 </file>
 
-<file path=ppt/slides/slide16.xml><?xml version="1.0" encoding="utf-8"?>
+<file path=ppt/slides/slide17.xml><?xml version="1.0" encoding="utf-8"?>
 <p:sld xmlns:a="http://schemas.openxmlformats.org/drawingml/2006/main" xmlns:r="http://schemas.openxmlformats.org/officeDocument/2006/relationships" xmlns:p="http://schemas.openxmlformats.org/presentationml/2006/main">
   <p:cSld>
     <p:spTree>
@@ -9376,7 +9656,7 @@
 </p:sld>
 </file>
 
-<file path=ppt/slides/slide17.xml><?xml version="1.0" encoding="utf-8"?>
+<file path=ppt/slides/slide18.xml><?xml version="1.0" encoding="utf-8"?>
 <p:sld xmlns:a="http://schemas.openxmlformats.org/drawingml/2006/main" xmlns:r="http://schemas.openxmlformats.org/officeDocument/2006/relationships" xmlns:p="http://schemas.openxmlformats.org/presentationml/2006/main">
   <p:cSld>
     <p:spTree>
@@ -9938,7 +10218,7 @@
 </p:sld>
 </file>
 
-<file path=ppt/slides/slide18.xml><?xml version="1.0" encoding="utf-8"?>
+<file path=ppt/slides/slide19.xml><?xml version="1.0" encoding="utf-8"?>
 <p:sld xmlns:a="http://schemas.openxmlformats.org/drawingml/2006/main" xmlns:r="http://schemas.openxmlformats.org/officeDocument/2006/relationships" xmlns:p="http://schemas.openxmlformats.org/presentationml/2006/main">
   <p:cSld>
     <p:spTree>
@@ -11549,21 +11829,49 @@
                     <a:latin typeface="Times New Roman" panose="02020603050405020304" pitchFamily="18" charset="0"/>
                     <a:cs typeface="Times New Roman" panose="02020603050405020304" pitchFamily="18" charset="0"/>
                   </a:rPr>
-                  <a:t>. Upon unlimited repetitions of the observations that yielded this interval, we expect </a:t>
+                  <a:t>. If the observations are repeated (infinitely!) many times, it is </a:t>
                 </a:r>
                 <a:r>
                   <a:rPr lang="en-US" i="1" dirty="0">
                     <a:latin typeface="Times New Roman" panose="02020603050405020304" pitchFamily="18" charset="0"/>
                     <a:cs typeface="Times New Roman" panose="02020603050405020304" pitchFamily="18" charset="0"/>
                   </a:rPr>
-                  <a:t>at least </a:t>
+                  <a:t>guaranteed</a:t>
                 </a:r>
                 <a:r>
                   <a:rPr lang="en-US" dirty="0">
                     <a:latin typeface="Times New Roman" panose="02020603050405020304" pitchFamily="18" charset="0"/>
                     <a:cs typeface="Times New Roman" panose="02020603050405020304" pitchFamily="18" charset="0"/>
                   </a:rPr>
-                  <a:t>68% of the intervals deduced from the repeated observations to include the true value of the Hubble constant.</a:t>
+                  <a:t> that </a:t>
+                </a:r>
+                <a:r>
+                  <a:rPr lang="en-US" i="1" dirty="0">
+                    <a:latin typeface="Times New Roman" panose="02020603050405020304" pitchFamily="18" charset="0"/>
+                    <a:cs typeface="Times New Roman" panose="02020603050405020304" pitchFamily="18" charset="0"/>
+                  </a:rPr>
+                  <a:t>at least </a:t>
+                </a:r>
+                <a:r>
+                  <a:rPr lang="en-US" dirty="0">
+                    <a:latin typeface="Times New Roman" panose="02020603050405020304" pitchFamily="18" charset="0"/>
+                    <a:cs typeface="Times New Roman" panose="02020603050405020304" pitchFamily="18" charset="0"/>
+                  </a:rPr>
+                  <a:t>68% of the intervals obtained will include the true value of the Hubble constant, </a:t>
+                </a:r>
+                <a:r>
+                  <a:rPr lang="en-US" i="1" dirty="0">
+                    <a:latin typeface="Times New Roman" panose="02020603050405020304" pitchFamily="18" charset="0"/>
+                    <a:cs typeface="Times New Roman" panose="02020603050405020304" pitchFamily="18" charset="0"/>
+                  </a:rPr>
+                  <a:t>whatever the true value might be</a:t>
+                </a:r>
+                <a:r>
+                  <a:rPr lang="en-US" dirty="0">
+                    <a:latin typeface="Times New Roman" panose="02020603050405020304" pitchFamily="18" charset="0"/>
+                    <a:cs typeface="Times New Roman" panose="02020603050405020304" pitchFamily="18" charset="0"/>
+                  </a:rPr>
+                  <a:t>.</a:t>
                 </a:r>
               </a:p>
               <a:p>
@@ -11599,7 +11907,7 @@
               <a:blipFill>
                 <a:blip r:embed="rId2"/>
                 <a:stretch>
-                  <a:fillRect l="-1305" t="-1316" r="-1794" b="-3684"/>
+                  <a:fillRect l="-1305" t="-1316" b="-3684"/>
                 </a:stretch>
               </a:blipFill>
             </p:spPr>
@@ -12035,7 +12343,7 @@
                     <a:latin typeface="Times New Roman" panose="02020603050405020304" pitchFamily="18" charset="0"/>
                     <a:cs typeface="Times New Roman" panose="02020603050405020304" pitchFamily="18" charset="0"/>
                   </a:rPr>
-                  <a:t> are entered into the statistical model, the statistical model becomes the </a:t>
+                  <a:t> are entered into the statistical model, the latter becomes the </a:t>
                 </a:r>
                 <a:r>
                   <a:rPr lang="en-US" dirty="0">
@@ -12062,39 +12370,6 @@
                       <m:jc m:val="centerGroup"/>
                     </m:oMathParaPr>
                     <m:oMath xmlns:m="http://schemas.openxmlformats.org/officeDocument/2006/math">
-                      <m:r>
-                        <a:rPr lang="en-US" b="0" i="1" smtClean="0">
-                          <a:latin typeface="Cambria Math" panose="02040503050406030204" pitchFamily="18" charset="0"/>
-                          <a:cs typeface="Times New Roman" panose="02020603050405020304" pitchFamily="18" charset="0"/>
-                        </a:rPr>
-                        <m:t>𝐿</m:t>
-                      </m:r>
-                      <m:d>
-                        <m:dPr>
-                          <m:ctrlPr>
-                            <a:rPr lang="en-US" b="0" i="1" smtClean="0">
-                              <a:latin typeface="Cambria Math" panose="02040503050406030204" pitchFamily="18" charset="0"/>
-                              <a:cs typeface="Times New Roman" panose="02020603050405020304" pitchFamily="18" charset="0"/>
-                            </a:rPr>
-                          </m:ctrlPr>
-                        </m:dPr>
-                        <m:e>
-                          <m:r>
-                            <a:rPr lang="en-US" b="0" i="1" smtClean="0">
-                              <a:latin typeface="Cambria Math" panose="02040503050406030204" pitchFamily="18" charset="0"/>
-                              <a:cs typeface="Times New Roman" panose="02020603050405020304" pitchFamily="18" charset="0"/>
-                            </a:rPr>
-                            <m:t>𝜃</m:t>
-                          </m:r>
-                        </m:e>
-                      </m:d>
-                      <m:r>
-                        <a:rPr lang="en-US" b="0" i="1" smtClean="0">
-                          <a:latin typeface="Cambria Math" panose="02040503050406030204" pitchFamily="18" charset="0"/>
-                          <a:cs typeface="Times New Roman" panose="02020603050405020304" pitchFamily="18" charset="0"/>
-                        </a:rPr>
-                        <m:t>=</m:t>
-                      </m:r>
                       <m:r>
                         <a:rPr lang="en-US" b="0" i="1" smtClean="0">
                           <a:latin typeface="Cambria Math" panose="02040503050406030204" pitchFamily="18" charset="0"/>
@@ -12520,7 +12795,7 @@
                 <a:latin typeface="Times New Roman" panose="02020603050405020304" pitchFamily="18" charset="0"/>
                 <a:cs typeface="Times New Roman" panose="02020603050405020304" pitchFamily="18" charset="0"/>
               </a:rPr>
-              <a:t>However, by leveraging domain-specific simulators, it is possible to make inferences without </a:t>
+              <a:t>However, if one has access to a high-fidelity simulator, it is possible to make inferences without </a:t>
             </a:r>
             <a:r>
               <a:rPr lang="en-US" i="1" dirty="0">
@@ -12534,21 +12809,7 @@
                 <a:latin typeface="Times New Roman" panose="02020603050405020304" pitchFamily="18" charset="0"/>
                 <a:cs typeface="Times New Roman" panose="02020603050405020304" pitchFamily="18" charset="0"/>
               </a:rPr>
-              <a:t> knowledge of the statistical model. Knowledge of the statistical model is </a:t>
-            </a:r>
-            <a:r>
-              <a:rPr lang="en-US" i="1" dirty="0">
-                <a:latin typeface="Times New Roman" panose="02020603050405020304" pitchFamily="18" charset="0"/>
-                <a:cs typeface="Times New Roman" panose="02020603050405020304" pitchFamily="18" charset="0"/>
-              </a:rPr>
-              <a:t>implicit</a:t>
-            </a:r>
-            <a:r>
-              <a:rPr lang="en-US" dirty="0">
-                <a:latin typeface="Times New Roman" panose="02020603050405020304" pitchFamily="18" charset="0"/>
-                <a:cs typeface="Times New Roman" panose="02020603050405020304" pitchFamily="18" charset="0"/>
-              </a:rPr>
-              <a:t> in the data generated by the simulators. </a:t>
+              <a:t> knowledge of the statistical model. </a:t>
             </a:r>
           </a:p>
           <a:p>
@@ -12574,14 +12835,14 @@
                 <a:latin typeface="Times New Roman" panose="02020603050405020304" pitchFamily="18" charset="0"/>
                 <a:cs typeface="Times New Roman" panose="02020603050405020304" pitchFamily="18" charset="0"/>
               </a:rPr>
-              <a:t>1,2</a:t>
+              <a:t>1,2,3</a:t>
             </a:r>
             <a:r>
               <a:rPr lang="en-US" dirty="0">
                 <a:latin typeface="Times New Roman" panose="02020603050405020304" pitchFamily="18" charset="0"/>
                 <a:cs typeface="Times New Roman" panose="02020603050405020304" pitchFamily="18" charset="0"/>
               </a:rPr>
-              <a:t> are a set of methods for making inferences directly from real and simulated data.</a:t>
+              <a:t> are methods for making inferences from real data using a simulator.</a:t>
             </a:r>
             <a:br>
               <a:rPr lang="en-US" dirty="0">
@@ -12681,6 +12942,37 @@
               </a:rPr>
               <a:t>] 6 Apr 2023. </a:t>
             </a:r>
+          </a:p>
+          <a:p>
+            <a:pPr marL="457200" indent="-457200">
+              <a:buFont typeface="+mj-lt"/>
+              <a:buAutoNum type="arabicPeriod"/>
+            </a:pPr>
+            <a:r>
+              <a:rPr lang="en-US" sz="1600" dirty="0"/>
+              <a:t>A. Al Kadhim, HBP, O. F. Prosper, </a:t>
+            </a:r>
+            <a:r>
+              <a:rPr lang="en-US" sz="1600" i="1" dirty="0"/>
+              <a:t>Mach. Learn.: Sci. Technol. </a:t>
+            </a:r>
+            <a:r>
+              <a:rPr lang="en-US" sz="1600" b="1" dirty="0"/>
+              <a:t>5 </a:t>
+            </a:r>
+            <a:r>
+              <a:rPr lang="en-US" sz="1600" dirty="0"/>
+              <a:t>(2024) 015020. </a:t>
+            </a:r>
+          </a:p>
+          <a:p>
+            <a:pPr marL="0" indent="0">
+              <a:buNone/>
+            </a:pPr>
+            <a:endParaRPr lang="en-US" sz="1600" dirty="0">
+              <a:effectLst/>
+              <a:latin typeface="+mn-lt"/>
+            </a:endParaRPr>
           </a:p>
           <a:p>
             <a:pPr marL="457200" indent="-457200">
@@ -12923,6 +13215,49 @@
                                   </p:childTnLst>
                                 </p:cTn>
                               </p:par>
+                              <p:par>
+                                <p:cTn id="19" presetID="10" presetClass="entr" presetSubtype="0" fill="hold" nodeType="withEffect">
+                                  <p:stCondLst>
+                                    <p:cond delay="0"/>
+                                  </p:stCondLst>
+                                  <p:childTnLst>
+                                    <p:set>
+                                      <p:cBhvr>
+                                        <p:cTn id="20" dur="1" fill="hold">
+                                          <p:stCondLst>
+                                            <p:cond delay="0"/>
+                                          </p:stCondLst>
+                                        </p:cTn>
+                                        <p:tgtEl>
+                                          <p:spTgt spid="10">
+                                            <p:txEl>
+                                              <p:pRg st="5" end="5"/>
+                                            </p:txEl>
+                                          </p:spTgt>
+                                        </p:tgtEl>
+                                        <p:attrNameLst>
+                                          <p:attrName>style.visibility</p:attrName>
+                                        </p:attrNameLst>
+                                      </p:cBhvr>
+                                      <p:to>
+                                        <p:strVal val="visible"/>
+                                      </p:to>
+                                    </p:set>
+                                    <p:animEffect transition="in" filter="fade">
+                                      <p:cBhvr>
+                                        <p:cTn id="21" dur="500"/>
+                                        <p:tgtEl>
+                                          <p:spTgt spid="10">
+                                            <p:txEl>
+                                              <p:pRg st="5" end="5"/>
+                                            </p:txEl>
+                                          </p:spTgt>
+                                        </p:tgtEl>
+                                      </p:cBhvr>
+                                    </p:animEffect>
+                                  </p:childTnLst>
+                                </p:cTn>
+                              </p:par>
                             </p:childTnLst>
                           </p:cTn>
                         </p:par>
@@ -13136,7 +13471,12 @@
                 <p:ph idx="1"/>
               </p:nvPr>
             </p:nvSpPr>
-            <p:spPr/>
+            <p:spPr>
+              <a:xfrm>
+                <a:off x="711200" y="1295400"/>
+                <a:ext cx="7899400" cy="4819650"/>
+              </a:xfrm>
+            </p:spPr>
             <p:txBody>
               <a:bodyPr/>
               <a:lstStyle/>
@@ -13584,7 +13924,51 @@
                     <a:latin typeface="Times New Roman" panose="02020603050405020304" pitchFamily="18" charset="0"/>
                     <a:cs typeface="Times New Roman" panose="02020603050405020304" pitchFamily="18" charset="0"/>
                   </a:rPr>
-                  <a:t>Compute the p-value </a:t>
+                  <a:t>Choose a small </a:t>
+                </a:r>
+                <a:r>
+                  <a:rPr lang="en-US" i="1" dirty="0">
+                    <a:latin typeface="Times New Roman" panose="02020603050405020304" pitchFamily="18" charset="0"/>
+                    <a:cs typeface="Times New Roman" panose="02020603050405020304" pitchFamily="18" charset="0"/>
+                  </a:rPr>
+                  <a:t>fixed</a:t>
+                </a:r>
+                <a:r>
+                  <a:rPr lang="en-US" dirty="0">
+                    <a:latin typeface="Times New Roman" panose="02020603050405020304" pitchFamily="18" charset="0"/>
+                    <a:cs typeface="Times New Roman" panose="02020603050405020304" pitchFamily="18" charset="0"/>
+                  </a:rPr>
+                  <a:t> probability </a:t>
+                </a:r>
+                <a14:m>
+                  <m:oMath xmlns:m="http://schemas.openxmlformats.org/officeDocument/2006/math">
+                    <m:r>
+                      <a:rPr lang="en-US" i="1">
+                        <a:solidFill>
+                          <a:srgbClr val="0033CC"/>
+                        </a:solidFill>
+                        <a:latin typeface="Cambria Math" panose="02040503050406030204" pitchFamily="18" charset="0"/>
+                        <a:cs typeface="Times New Roman" panose="02020603050405020304" pitchFamily="18" charset="0"/>
+                      </a:rPr>
+                      <m:t>𝛼</m:t>
+                    </m:r>
+                  </m:oMath>
+                </a14:m>
+                <a:r>
+                  <a:rPr lang="en-US" dirty="0">
+                    <a:latin typeface="Times New Roman" panose="02020603050405020304" pitchFamily="18" charset="0"/>
+                    <a:cs typeface="Times New Roman" panose="02020603050405020304" pitchFamily="18" charset="0"/>
+                  </a:rPr>
+                  <a:t>.</a:t>
+                </a:r>
+              </a:p>
+              <a:p>
+                <a:r>
+                  <a:rPr lang="en-US" dirty="0">
+                    <a:latin typeface="Times New Roman" panose="02020603050405020304" pitchFamily="18" charset="0"/>
+                    <a:cs typeface="Times New Roman" panose="02020603050405020304" pitchFamily="18" charset="0"/>
+                  </a:rPr>
+                  <a:t>Compute </a:t>
                 </a:r>
                 <a14:m>
                   <m:oMath xmlns:m="http://schemas.openxmlformats.org/officeDocument/2006/math">
@@ -13722,7 +14106,7 @@
                     <a:latin typeface="Times New Roman" panose="02020603050405020304" pitchFamily="18" charset="0"/>
                     <a:cs typeface="Times New Roman" panose="02020603050405020304" pitchFamily="18" charset="0"/>
                   </a:rPr>
-                  <a:t>, and </a:t>
+                  <a:t>, where </a:t>
                 </a:r>
                 <a14:m>
                   <m:oMath xmlns:m="http://schemas.openxmlformats.org/officeDocument/2006/math">
@@ -13849,50 +14233,6 @@
                     <a:latin typeface="Times New Roman" panose="02020603050405020304" pitchFamily="18" charset="0"/>
                     <a:cs typeface="Times New Roman" panose="02020603050405020304" pitchFamily="18" charset="0"/>
                   </a:rPr>
-                  <a:t>Choose a small </a:t>
-                </a:r>
-                <a:r>
-                  <a:rPr lang="en-US" i="1" dirty="0">
-                    <a:latin typeface="Times New Roman" panose="02020603050405020304" pitchFamily="18" charset="0"/>
-                    <a:cs typeface="Times New Roman" panose="02020603050405020304" pitchFamily="18" charset="0"/>
-                  </a:rPr>
-                  <a:t>fixed</a:t>
-                </a:r>
-                <a:r>
-                  <a:rPr lang="en-US" dirty="0">
-                    <a:latin typeface="Times New Roman" panose="02020603050405020304" pitchFamily="18" charset="0"/>
-                    <a:cs typeface="Times New Roman" panose="02020603050405020304" pitchFamily="18" charset="0"/>
-                  </a:rPr>
-                  <a:t> probability </a:t>
-                </a:r>
-                <a14:m>
-                  <m:oMath xmlns:m="http://schemas.openxmlformats.org/officeDocument/2006/math">
-                    <m:r>
-                      <a:rPr lang="en-US" b="0" i="1" smtClean="0">
-                        <a:solidFill>
-                          <a:srgbClr val="0033CC"/>
-                        </a:solidFill>
-                        <a:latin typeface="Cambria Math" panose="02040503050406030204" pitchFamily="18" charset="0"/>
-                        <a:cs typeface="Times New Roman" panose="02020603050405020304" pitchFamily="18" charset="0"/>
-                      </a:rPr>
-                      <m:t>𝛼</m:t>
-                    </m:r>
-                  </m:oMath>
-                </a14:m>
-                <a:r>
-                  <a:rPr lang="en-US" dirty="0">
-                    <a:latin typeface="Times New Roman" panose="02020603050405020304" pitchFamily="18" charset="0"/>
-                    <a:cs typeface="Times New Roman" panose="02020603050405020304" pitchFamily="18" charset="0"/>
-                  </a:rPr>
-                  <a:t>.</a:t>
-                </a:r>
-              </a:p>
-              <a:p>
-                <a:r>
-                  <a:rPr lang="en-US" dirty="0">
-                    <a:latin typeface="Times New Roman" panose="02020603050405020304" pitchFamily="18" charset="0"/>
-                    <a:cs typeface="Times New Roman" panose="02020603050405020304" pitchFamily="18" charset="0"/>
-                  </a:rPr>
                   <a:t>If </a:t>
                 </a:r>
                 <a14:m>
@@ -13996,10 +14336,14 @@
               </p:nvPr>
             </p:nvSpPr>
             <p:spPr>
+              <a:xfrm>
+                <a:off x="711200" y="1295400"/>
+                <a:ext cx="7899400" cy="4819650"/>
+              </a:xfrm>
               <a:blipFill>
                 <a:blip r:embed="rId3"/>
                 <a:stretch>
-                  <a:fillRect l="-1305" t="-1316" r="-816" b="-5263"/>
+                  <a:fillRect l="-1284" t="-1316" b="-5263"/>
                 </a:stretch>
               </a:blipFill>
             </p:spPr>
@@ -14409,7 +14753,7 @@
         <p:cNvPr id="1" name="">
           <a:extLst>
             <a:ext uri="{FF2B5EF4-FFF2-40B4-BE49-F238E27FC236}">
-              <a16:creationId xmlns:a16="http://schemas.microsoft.com/office/drawing/2014/main" id="{A5917AC2-0595-9D9E-EAF3-79228ADA3BCC}"/>
+              <a16:creationId xmlns:a16="http://schemas.microsoft.com/office/drawing/2014/main" id="{7FE34E25-07D8-59DB-B94A-8E11E900003C}"/>
             </a:ext>
           </a:extLst>
         </p:cNvPr>
@@ -14429,7 +14773,7 @@
           <p:cNvPr id="4" name="Picture 3">
             <a:extLst>
               <a:ext uri="{FF2B5EF4-FFF2-40B4-BE49-F238E27FC236}">
-                <a16:creationId xmlns:a16="http://schemas.microsoft.com/office/drawing/2014/main" id="{6525F2C9-1A61-62B6-6072-4E5B7ECFE8DE}"/>
+                <a16:creationId xmlns:a16="http://schemas.microsoft.com/office/drawing/2014/main" id="{1197054B-D78D-99BD-B120-17E7555F31C8}"/>
               </a:ext>
             </a:extLst>
           </p:cNvPr>
@@ -14459,7 +14803,7 @@
           <p:cNvPr id="3" name="Title 2">
             <a:extLst>
               <a:ext uri="{FF2B5EF4-FFF2-40B4-BE49-F238E27FC236}">
-                <a16:creationId xmlns:a16="http://schemas.microsoft.com/office/drawing/2014/main" id="{F37424C4-8BCC-814E-FBDC-765A6631D733}"/>
+                <a16:creationId xmlns:a16="http://schemas.microsoft.com/office/drawing/2014/main" id="{F0AFC004-FCCF-9FF5-DF29-9AE124E43D4C}"/>
               </a:ext>
             </a:extLst>
           </p:cNvPr>
@@ -14490,14 +14834,14 @@
           </a:p>
         </p:txBody>
       </p:sp>
-      <mc:AlternateContent xmlns:mc="http://schemas.openxmlformats.org/markup-compatibility/2006" xmlns:a14="http://schemas.microsoft.com/office/drawing/2010/main">
-        <mc:Choice Requires="a14">
+      <mc:AlternateContent xmlns:mc="http://schemas.openxmlformats.org/markup-compatibility/2006">
+        <mc:Choice xmlns:a14="http://schemas.microsoft.com/office/drawing/2010/main" Requires="a14">
           <p:sp>
             <p:nvSpPr>
               <p:cNvPr id="10" name="Content Placeholder 9">
                 <a:extLst>
                   <a:ext uri="{FF2B5EF4-FFF2-40B4-BE49-F238E27FC236}">
-                    <a16:creationId xmlns:a16="http://schemas.microsoft.com/office/drawing/2014/main" id="{3813272D-D487-A9AF-0F95-B7A3A5544C44}"/>
+                    <a16:creationId xmlns:a16="http://schemas.microsoft.com/office/drawing/2014/main" id="{0114A438-7BBD-3FD2-1A23-CC0CD6BB8984}"/>
                   </a:ext>
                 </a:extLst>
               </p:cNvPr>
@@ -14517,10 +14861,70 @@
                   <a:rPr lang="en-US" dirty="0">
                     <a:latin typeface="+mn-lt"/>
                   </a:rPr>
-                  <a:t>Repeated application of the hypothesis test for different </a:t>
+                  <a:t>For a given dataset </a:t>
                 </a:r>
                 <a14:m>
                   <m:oMath xmlns:m="http://schemas.openxmlformats.org/officeDocument/2006/math">
+                    <m:r>
+                      <a:rPr lang="en-US" b="0" i="1" smtClean="0">
+                        <a:solidFill>
+                          <a:srgbClr val="0033CC"/>
+                        </a:solidFill>
+                        <a:latin typeface="Cambria Math" panose="02040503050406030204" pitchFamily="18" charset="0"/>
+                        <a:cs typeface="Times New Roman" panose="02020603050405020304" pitchFamily="18" charset="0"/>
+                      </a:rPr>
+                      <m:t>𝑋</m:t>
+                    </m:r>
+                    <m:r>
+                      <a:rPr lang="en-US" i="1">
+                        <a:solidFill>
+                          <a:srgbClr val="0033CC"/>
+                        </a:solidFill>
+                        <a:latin typeface="Cambria Math" panose="02040503050406030204" pitchFamily="18" charset="0"/>
+                        <a:cs typeface="Times New Roman" panose="02020603050405020304" pitchFamily="18" charset="0"/>
+                      </a:rPr>
+                      <m:t>=</m:t>
+                    </m:r>
+                    <m:r>
+                      <a:rPr lang="en-US" b="0" i="1" smtClean="0">
+                        <a:solidFill>
+                          <a:srgbClr val="0033CC"/>
+                        </a:solidFill>
+                        <a:latin typeface="Cambria Math" panose="02040503050406030204" pitchFamily="18" charset="0"/>
+                        <a:cs typeface="Times New Roman" panose="02020603050405020304" pitchFamily="18" charset="0"/>
+                      </a:rPr>
+                      <m:t>𝐷</m:t>
+                    </m:r>
+                  </m:oMath>
+                </a14:m>
+                <a:r>
+                  <a:rPr lang="en-US" dirty="0">
+                    <a:latin typeface="+mn-lt"/>
+                  </a:rPr>
+                  <a:t>, repeated application of this test for different values of </a:t>
+                </a:r>
+                <a14:m>
+                  <m:oMath xmlns:m="http://schemas.openxmlformats.org/officeDocument/2006/math">
+                    <m:r>
+                      <a:rPr lang="en-US" b="0" i="1" smtClean="0">
+                        <a:solidFill>
+                          <a:srgbClr val="0033CC"/>
+                        </a:solidFill>
+                        <a:latin typeface="Cambria Math" panose="02040503050406030204" pitchFamily="18" charset="0"/>
+                        <a:cs typeface="Times New Roman" panose="02020603050405020304" pitchFamily="18" charset="0"/>
+                      </a:rPr>
+                      <m:t>𝜃</m:t>
+                    </m:r>
+                    <m:r>
+                      <a:rPr lang="en-US" b="0" i="1" smtClean="0">
+                        <a:solidFill>
+                          <a:srgbClr val="0033CC"/>
+                        </a:solidFill>
+                        <a:latin typeface="Cambria Math" panose="02040503050406030204" pitchFamily="18" charset="0"/>
+                        <a:cs typeface="Times New Roman" panose="02020603050405020304" pitchFamily="18" charset="0"/>
+                      </a:rPr>
+                      <m:t>=</m:t>
+                    </m:r>
                     <m:sSub>
                       <m:sSubPr>
                         <m:ctrlPr>
@@ -14813,79 +15217,34 @@
                 </a:r>
               </a:p>
               <a:p>
+                <a:pPr/>
                 <a:r>
                   <a:rPr lang="en-US" dirty="0">
                     <a:latin typeface="Times New Roman" panose="02020603050405020304" pitchFamily="18" charset="0"/>
                     <a:cs typeface="Times New Roman" panose="02020603050405020304" pitchFamily="18" charset="0"/>
                   </a:rPr>
-                  <a:t>A key task is approximating </a:t>
+                  <a:t>Consequently, the criterion for </a:t>
+                </a:r>
+                <a:r>
+                  <a:rPr lang="en-US" i="1" dirty="0">
+                    <a:latin typeface="Times New Roman" panose="02020603050405020304" pitchFamily="18" charset="0"/>
+                    <a:cs typeface="Times New Roman" panose="02020603050405020304" pitchFamily="18" charset="0"/>
+                  </a:rPr>
+                  <a:t>not </a:t>
+                </a:r>
+                <a:r>
+                  <a:rPr lang="en-US" dirty="0">
+                    <a:latin typeface="Times New Roman" panose="02020603050405020304" pitchFamily="18" charset="0"/>
+                    <a:cs typeface="Times New Roman" panose="02020603050405020304" pitchFamily="18" charset="0"/>
+                  </a:rPr>
+                  <a:t>rejecting the hypothesis </a:t>
                 </a:r>
                 <a14:m>
                   <m:oMath xmlns:m="http://schemas.openxmlformats.org/officeDocument/2006/math">
-                    <m:r>
-                      <a:rPr lang="en-US" b="0" i="1" smtClean="0">
-                        <a:solidFill>
-                          <a:srgbClr val="0033CC"/>
-                        </a:solidFill>
-                        <a:latin typeface="Cambria Math" panose="02040503050406030204" pitchFamily="18" charset="0"/>
-                        <a:cs typeface="Times New Roman" panose="02020603050405020304" pitchFamily="18" charset="0"/>
-                      </a:rPr>
-                      <m:t>𝑝</m:t>
-                    </m:r>
-                    <m:r>
-                      <a:rPr lang="en-US" b="0" i="1" smtClean="0">
-                        <a:solidFill>
-                          <a:srgbClr val="0033CC"/>
-                        </a:solidFill>
-                        <a:latin typeface="Cambria Math" panose="02040503050406030204" pitchFamily="18" charset="0"/>
-                        <a:cs typeface="Times New Roman" panose="02020603050405020304" pitchFamily="18" charset="0"/>
-                      </a:rPr>
-                      <m:t>=</m:t>
-                    </m:r>
-                    <m:r>
-                      <a:rPr lang="en-US" b="0" i="1" smtClean="0">
-                        <a:solidFill>
-                          <a:srgbClr val="0033CC"/>
-                        </a:solidFill>
-                        <a:latin typeface="Cambria Math" panose="02040503050406030204" pitchFamily="18" charset="0"/>
-                        <a:cs typeface="Times New Roman" panose="02020603050405020304" pitchFamily="18" charset="0"/>
-                      </a:rPr>
-                      <m:t>𝑃</m:t>
-                    </m:r>
-                    <m:r>
-                      <a:rPr lang="en-US" b="0" i="1" smtClean="0">
-                        <a:solidFill>
-                          <a:srgbClr val="0033CC"/>
-                        </a:solidFill>
-                        <a:latin typeface="Cambria Math" panose="02040503050406030204" pitchFamily="18" charset="0"/>
-                        <a:cs typeface="Times New Roman" panose="02020603050405020304" pitchFamily="18" charset="0"/>
-                      </a:rPr>
-                      <m:t>(</m:t>
-                    </m:r>
-                    <m:r>
-                      <a:rPr lang="en-US" b="0" i="1" smtClean="0">
-                        <a:solidFill>
-                          <a:srgbClr val="0033CC"/>
-                        </a:solidFill>
-                        <a:latin typeface="Cambria Math" panose="02040503050406030204" pitchFamily="18" charset="0"/>
-                        <a:cs typeface="Times New Roman" panose="02020603050405020304" pitchFamily="18" charset="0"/>
-                      </a:rPr>
-                      <m:t>𝜆</m:t>
-                    </m:r>
-                    <m:r>
-                      <a:rPr lang="en-US" b="0" i="1" smtClean="0">
-                        <a:solidFill>
-                          <a:srgbClr val="0033CC"/>
-                        </a:solidFill>
-                        <a:latin typeface="Cambria Math" panose="02040503050406030204" pitchFamily="18" charset="0"/>
-                        <a:cs typeface="Times New Roman" panose="02020603050405020304" pitchFamily="18" charset="0"/>
-                      </a:rPr>
-                      <m:t>&gt;</m:t>
-                    </m:r>
                     <m:sSub>
                       <m:sSubPr>
                         <m:ctrlPr>
-                          <a:rPr lang="en-US" b="0" i="1" smtClean="0">
+                          <a:rPr lang="en-US" i="1">
                             <a:solidFill>
                               <a:srgbClr val="0033CC"/>
                             </a:solidFill>
@@ -14896,41 +15255,41 @@
                       </m:sSubPr>
                       <m:e>
                         <m:r>
-                          <a:rPr lang="en-US" b="0" i="1" smtClean="0">
+                          <a:rPr lang="en-US" i="1">
                             <a:solidFill>
                               <a:srgbClr val="0033CC"/>
                             </a:solidFill>
                             <a:latin typeface="Cambria Math" panose="02040503050406030204" pitchFamily="18" charset="0"/>
                             <a:cs typeface="Times New Roman" panose="02020603050405020304" pitchFamily="18" charset="0"/>
                           </a:rPr>
-                          <m:t>𝜆</m:t>
+                          <m:t>𝐻</m:t>
                         </m:r>
                       </m:e>
                       <m:sub>
                         <m:r>
-                          <a:rPr lang="en-US" b="0" i="1" smtClean="0">
+                          <a:rPr lang="en-US" i="1">
                             <a:solidFill>
                               <a:srgbClr val="0033CC"/>
                             </a:solidFill>
                             <a:latin typeface="Cambria Math" panose="02040503050406030204" pitchFamily="18" charset="0"/>
                             <a:cs typeface="Times New Roman" panose="02020603050405020304" pitchFamily="18" charset="0"/>
                           </a:rPr>
-                          <m:t>𝐷</m:t>
+                          <m:t>0</m:t>
                         </m:r>
                       </m:sub>
                     </m:sSub>
                     <m:r>
-                      <a:rPr lang="en-US" b="0" i="1" smtClean="0">
+                      <a:rPr lang="en-US" i="1">
                         <a:solidFill>
                           <a:srgbClr val="0033CC"/>
                         </a:solidFill>
                         <a:latin typeface="Cambria Math" panose="02040503050406030204" pitchFamily="18" charset="0"/>
                         <a:cs typeface="Times New Roman" panose="02020603050405020304" pitchFamily="18" charset="0"/>
                       </a:rPr>
-                      <m:t>|</m:t>
+                      <m:t>:</m:t>
                     </m:r>
                     <m:r>
-                      <a:rPr lang="en-US" b="0" i="1" smtClean="0">
+                      <a:rPr lang="en-US" i="1">
                         <a:solidFill>
                           <a:srgbClr val="0033CC"/>
                         </a:solidFill>
@@ -14940,116 +15299,7 @@
                       <m:t>𝜃</m:t>
                     </m:r>
                     <m:r>
-                      <a:rPr lang="en-US" b="0" i="1" smtClean="0">
-                        <a:solidFill>
-                          <a:srgbClr val="0033CC"/>
-                        </a:solidFill>
-                        <a:latin typeface="Cambria Math" panose="02040503050406030204" pitchFamily="18" charset="0"/>
-                        <a:cs typeface="Times New Roman" panose="02020603050405020304" pitchFamily="18" charset="0"/>
-                      </a:rPr>
-                      <m:t>)</m:t>
-                    </m:r>
-                  </m:oMath>
-                </a14:m>
-                <a:r>
-                  <a:rPr lang="en-US" dirty="0">
-                    <a:latin typeface="Times New Roman" panose="02020603050405020304" pitchFamily="18" charset="0"/>
-                    <a:cs typeface="Times New Roman" panose="02020603050405020304" pitchFamily="18" charset="0"/>
-                  </a:rPr>
-                  <a:t>, or, equivalently, the cumulative density function (</a:t>
-                </a:r>
-                <a:r>
-                  <a:rPr lang="en-US" dirty="0" err="1">
-                    <a:latin typeface="Times New Roman" panose="02020603050405020304" pitchFamily="18" charset="0"/>
-                    <a:cs typeface="Times New Roman" panose="02020603050405020304" pitchFamily="18" charset="0"/>
-                  </a:rPr>
-                  <a:t>cdf</a:t>
-                </a:r>
-                <a:r>
-                  <a:rPr lang="en-US" dirty="0">
-                    <a:latin typeface="Times New Roman" panose="02020603050405020304" pitchFamily="18" charset="0"/>
-                    <a:cs typeface="Times New Roman" panose="02020603050405020304" pitchFamily="18" charset="0"/>
-                  </a:rPr>
-                  <a:t>) </a:t>
-                </a:r>
-                <a14:m>
-                  <m:oMath xmlns:m="http://schemas.openxmlformats.org/officeDocument/2006/math">
-                    <m:r>
-                      <a:rPr lang="en-US" b="0" i="1" smtClean="0">
-                        <a:solidFill>
-                          <a:srgbClr val="0033CC"/>
-                        </a:solidFill>
-                        <a:latin typeface="Cambria Math" panose="02040503050406030204" pitchFamily="18" charset="0"/>
-                        <a:cs typeface="Times New Roman" panose="02020603050405020304" pitchFamily="18" charset="0"/>
-                      </a:rPr>
-                      <m:t>𝐶</m:t>
-                    </m:r>
-                    <m:d>
-                      <m:dPr>
-                        <m:ctrlPr>
-                          <a:rPr lang="en-US" b="0" i="1" smtClean="0">
-                            <a:solidFill>
-                              <a:srgbClr val="0033CC"/>
-                            </a:solidFill>
-                            <a:latin typeface="Cambria Math" panose="02040503050406030204" pitchFamily="18" charset="0"/>
-                            <a:cs typeface="Times New Roman" panose="02020603050405020304" pitchFamily="18" charset="0"/>
-                          </a:rPr>
-                        </m:ctrlPr>
-                      </m:dPr>
-                      <m:e>
-                        <m:sSub>
-                          <m:sSubPr>
-                            <m:ctrlPr>
-                              <a:rPr lang="en-US" b="0" i="1" smtClean="0">
-                                <a:solidFill>
-                                  <a:srgbClr val="0033CC"/>
-                                </a:solidFill>
-                                <a:latin typeface="Cambria Math" panose="02040503050406030204" pitchFamily="18" charset="0"/>
-                                <a:cs typeface="Times New Roman" panose="02020603050405020304" pitchFamily="18" charset="0"/>
-                              </a:rPr>
-                            </m:ctrlPr>
-                          </m:sSubPr>
-                          <m:e>
-                            <m:r>
-                              <a:rPr lang="en-US" b="0" i="1" smtClean="0">
-                                <a:solidFill>
-                                  <a:srgbClr val="0033CC"/>
-                                </a:solidFill>
-                                <a:latin typeface="Cambria Math" panose="02040503050406030204" pitchFamily="18" charset="0"/>
-                                <a:cs typeface="Times New Roman" panose="02020603050405020304" pitchFamily="18" charset="0"/>
-                              </a:rPr>
-                              <m:t>𝜆</m:t>
-                            </m:r>
-                          </m:e>
-                          <m:sub>
-                            <m:r>
-                              <a:rPr lang="en-US" b="0" i="1" smtClean="0">
-                                <a:solidFill>
-                                  <a:srgbClr val="0033CC"/>
-                                </a:solidFill>
-                                <a:latin typeface="Cambria Math" panose="02040503050406030204" pitchFamily="18" charset="0"/>
-                                <a:cs typeface="Times New Roman" panose="02020603050405020304" pitchFamily="18" charset="0"/>
-                              </a:rPr>
-                              <m:t>𝐷</m:t>
-                            </m:r>
-                          </m:sub>
-                        </m:sSub>
-                      </m:e>
-                      <m:e>
-                        <m:r>
-                          <a:rPr lang="en-US" b="0" i="1" smtClean="0">
-                            <a:solidFill>
-                              <a:srgbClr val="0033CC"/>
-                            </a:solidFill>
-                            <a:latin typeface="Cambria Math" panose="02040503050406030204" pitchFamily="18" charset="0"/>
-                            <a:cs typeface="Times New Roman" panose="02020603050405020304" pitchFamily="18" charset="0"/>
-                          </a:rPr>
-                          <m:t>𝜃</m:t>
-                        </m:r>
-                      </m:e>
-                    </m:d>
-                    <m:r>
-                      <a:rPr lang="en-US" b="0" i="1" smtClean="0">
+                      <a:rPr lang="en-US" i="1">
                         <a:solidFill>
                           <a:srgbClr val="0033CC"/>
                         </a:solidFill>
@@ -15058,51 +15308,10 @@
                       </a:rPr>
                       <m:t>=</m:t>
                     </m:r>
-                    <m:r>
-                      <a:rPr lang="en-US" b="0" i="1" smtClean="0">
-                        <a:solidFill>
-                          <a:srgbClr val="0033CC"/>
-                        </a:solidFill>
-                        <a:latin typeface="Cambria Math" panose="02040503050406030204" pitchFamily="18" charset="0"/>
-                        <a:cs typeface="Times New Roman" panose="02020603050405020304" pitchFamily="18" charset="0"/>
-                      </a:rPr>
-                      <m:t>𝑃</m:t>
-                    </m:r>
-                    <m:r>
-                      <a:rPr lang="en-US" b="0" i="1" smtClean="0">
-                        <a:solidFill>
-                          <a:srgbClr val="0033CC"/>
-                        </a:solidFill>
-                        <a:latin typeface="Cambria Math" panose="02040503050406030204" pitchFamily="18" charset="0"/>
-                        <a:cs typeface="Times New Roman" panose="02020603050405020304" pitchFamily="18" charset="0"/>
-                      </a:rPr>
-                      <m:t>(</m:t>
-                    </m:r>
-                    <m:r>
-                      <a:rPr lang="en-US" b="0" i="1" smtClean="0">
-                        <a:solidFill>
-                          <a:srgbClr val="0033CC"/>
-                        </a:solidFill>
-                        <a:latin typeface="Cambria Math" panose="02040503050406030204" pitchFamily="18" charset="0"/>
-                        <a:cs typeface="Times New Roman" panose="02020603050405020304" pitchFamily="18" charset="0"/>
-                      </a:rPr>
-                      <m:t>𝜆</m:t>
-                    </m:r>
-                    <m:r>
-                      <a:rPr lang="en-US" b="0" i="1" smtClean="0">
-                        <a:solidFill>
-                          <a:srgbClr val="0033CC"/>
-                        </a:solidFill>
-                        <a:latin typeface="Cambria Math" panose="02040503050406030204" pitchFamily="18" charset="0"/>
-                        <a:ea typeface="Cambria Math" panose="02040503050406030204" pitchFamily="18" charset="0"/>
-                        <a:cs typeface="Times New Roman" panose="02020603050405020304" pitchFamily="18" charset="0"/>
-                      </a:rPr>
-                      <m:t>≤</m:t>
-                    </m:r>
                     <m:sSub>
                       <m:sSubPr>
                         <m:ctrlPr>
-                          <a:rPr lang="en-US" b="0" i="1" smtClean="0">
+                          <a:rPr lang="en-US" i="1">
                             <a:solidFill>
                               <a:srgbClr val="0033CC"/>
                             </a:solidFill>
@@ -15113,9 +15322,189 @@
                       </m:sSubPr>
                       <m:e>
                         <m:r>
-                          <a:rPr lang="en-US" b="0" i="1" smtClean="0">
+                          <a:rPr lang="en-US" i="1">
                             <a:solidFill>
                               <a:srgbClr val="0033CC"/>
+                            </a:solidFill>
+                            <a:latin typeface="Cambria Math" panose="02040503050406030204" pitchFamily="18" charset="0"/>
+                            <a:cs typeface="Times New Roman" panose="02020603050405020304" pitchFamily="18" charset="0"/>
+                          </a:rPr>
+                          <m:t>𝜃</m:t>
+                        </m:r>
+                      </m:e>
+                      <m:sub>
+                        <m:r>
+                          <a:rPr lang="en-US" i="1">
+                            <a:solidFill>
+                              <a:srgbClr val="0033CC"/>
+                            </a:solidFill>
+                            <a:latin typeface="Cambria Math" panose="02040503050406030204" pitchFamily="18" charset="0"/>
+                            <a:cs typeface="Times New Roman" panose="02020603050405020304" pitchFamily="18" charset="0"/>
+                          </a:rPr>
+                          <m:t>0</m:t>
+                        </m:r>
+                      </m:sub>
+                    </m:sSub>
+                  </m:oMath>
+                </a14:m>
+                <a:r>
+                  <a:rPr lang="en-US" dirty="0">
+                    <a:solidFill>
+                      <a:srgbClr val="0033CC"/>
+                    </a:solidFill>
+                    <a:latin typeface="Times New Roman" panose="02020603050405020304" pitchFamily="18" charset="0"/>
+                    <a:cs typeface="Times New Roman" panose="02020603050405020304" pitchFamily="18" charset="0"/>
+                  </a:rPr>
+                  <a:t>, </a:t>
+                </a:r>
+                <a:r>
+                  <a:rPr lang="en-US" dirty="0">
+                    <a:solidFill>
+                      <a:schemeClr val="tx1"/>
+                    </a:solidFill>
+                    <a:latin typeface="Times New Roman" panose="02020603050405020304" pitchFamily="18" charset="0"/>
+                    <a:cs typeface="Times New Roman" panose="02020603050405020304" pitchFamily="18" charset="0"/>
+                  </a:rPr>
+                  <a:t>and, therefore, adding </a:t>
+                </a:r>
+                <a14:m>
+                  <m:oMath xmlns:m="http://schemas.openxmlformats.org/officeDocument/2006/math">
+                    <m:sSub>
+                      <m:sSubPr>
+                        <m:ctrlPr>
+                          <a:rPr lang="en-US" i="1">
+                            <a:solidFill>
+                              <a:schemeClr val="tx1"/>
+                            </a:solidFill>
+                            <a:latin typeface="Cambria Math" panose="02040503050406030204" pitchFamily="18" charset="0"/>
+                            <a:cs typeface="Times New Roman" panose="02020603050405020304" pitchFamily="18" charset="0"/>
+                          </a:rPr>
+                        </m:ctrlPr>
+                      </m:sSubPr>
+                      <m:e>
+                        <m:r>
+                          <a:rPr lang="en-US" i="1">
+                            <a:solidFill>
+                              <a:schemeClr val="tx1"/>
+                            </a:solidFill>
+                            <a:latin typeface="Cambria Math" panose="02040503050406030204" pitchFamily="18" charset="0"/>
+                            <a:cs typeface="Times New Roman" panose="02020603050405020304" pitchFamily="18" charset="0"/>
+                          </a:rPr>
+                          <m:t>𝜃</m:t>
+                        </m:r>
+                      </m:e>
+                      <m:sub>
+                        <m:r>
+                          <a:rPr lang="en-US" i="1">
+                            <a:solidFill>
+                              <a:schemeClr val="tx1"/>
+                            </a:solidFill>
+                            <a:latin typeface="Cambria Math" panose="02040503050406030204" pitchFamily="18" charset="0"/>
+                            <a:cs typeface="Times New Roman" panose="02020603050405020304" pitchFamily="18" charset="0"/>
+                          </a:rPr>
+                          <m:t>0</m:t>
+                        </m:r>
+                      </m:sub>
+                    </m:sSub>
+                  </m:oMath>
+                </a14:m>
+                <a:r>
+                  <a:rPr lang="en-US" dirty="0">
+                    <a:solidFill>
+                      <a:schemeClr val="tx1"/>
+                    </a:solidFill>
+                    <a:latin typeface="Times New Roman" panose="02020603050405020304" pitchFamily="18" charset="0"/>
+                    <a:cs typeface="Times New Roman" panose="02020603050405020304" pitchFamily="18" charset="0"/>
+                  </a:rPr>
+                  <a:t> to the confidence set is: </a:t>
+                </a:r>
+                <a:br>
+                  <a:rPr lang="en-US" dirty="0">
+                    <a:solidFill>
+                      <a:schemeClr val="tx1"/>
+                    </a:solidFill>
+                    <a:latin typeface="Times New Roman" panose="02020603050405020304" pitchFamily="18" charset="0"/>
+                    <a:cs typeface="Times New Roman" panose="02020603050405020304" pitchFamily="18" charset="0"/>
+                  </a:rPr>
+                </a:br>
+                <a:br>
+                  <a:rPr lang="en-US" b="0" i="1" dirty="0">
+                    <a:solidFill>
+                      <a:srgbClr val="0033CC"/>
+                    </a:solidFill>
+                    <a:latin typeface="Cambria Math" panose="02040503050406030204" pitchFamily="18" charset="0"/>
+                    <a:cs typeface="Times New Roman" panose="02020603050405020304" pitchFamily="18" charset="0"/>
+                  </a:rPr>
+                </a:br>
+                <a14:m>
+                  <m:oMath xmlns:m="http://schemas.openxmlformats.org/officeDocument/2006/math">
+                    <m:r>
+                      <a:rPr lang="en-US" b="0" i="1" smtClean="0">
+                        <a:solidFill>
+                          <a:schemeClr val="tx1"/>
+                        </a:solidFill>
+                        <a:latin typeface="Cambria Math" panose="02040503050406030204" pitchFamily="18" charset="0"/>
+                        <a:cs typeface="Times New Roman" panose="02020603050405020304" pitchFamily="18" charset="0"/>
+                      </a:rPr>
+                      <m:t>1−</m:t>
+                    </m:r>
+                    <m:r>
+                      <a:rPr lang="en-US" i="1">
+                        <a:solidFill>
+                          <a:schemeClr val="tx1"/>
+                        </a:solidFill>
+                        <a:latin typeface="Cambria Math" panose="02040503050406030204" pitchFamily="18" charset="0"/>
+                        <a:cs typeface="Times New Roman" panose="02020603050405020304" pitchFamily="18" charset="0"/>
+                      </a:rPr>
+                      <m:t>𝑃</m:t>
+                    </m:r>
+                    <m:r>
+                      <a:rPr lang="en-US" i="1">
+                        <a:solidFill>
+                          <a:schemeClr val="tx1"/>
+                        </a:solidFill>
+                        <a:latin typeface="Cambria Math" panose="02040503050406030204" pitchFamily="18" charset="0"/>
+                        <a:cs typeface="Times New Roman" panose="02020603050405020304" pitchFamily="18" charset="0"/>
+                      </a:rPr>
+                      <m:t>(</m:t>
+                    </m:r>
+                    <m:r>
+                      <a:rPr lang="en-US" i="1">
+                        <a:solidFill>
+                          <a:schemeClr val="tx1"/>
+                        </a:solidFill>
+                        <a:latin typeface="Cambria Math" panose="02040503050406030204" pitchFamily="18" charset="0"/>
+                        <a:cs typeface="Times New Roman" panose="02020603050405020304" pitchFamily="18" charset="0"/>
+                      </a:rPr>
+                      <m:t>𝜆</m:t>
+                    </m:r>
+                    <m:r>
+                      <a:rPr lang="en-US" i="1">
+                        <a:solidFill>
+                          <a:schemeClr val="tx1"/>
+                        </a:solidFill>
+                        <a:latin typeface="Cambria Math" panose="02040503050406030204" pitchFamily="18" charset="0"/>
+                        <a:cs typeface="Times New Roman" panose="02020603050405020304" pitchFamily="18" charset="0"/>
+                      </a:rPr>
+                      <m:t>&gt;</m:t>
+                    </m:r>
+                    <m:sSub>
+                      <m:sSubPr>
+                        <m:ctrlPr>
+                          <a:rPr lang="en-US" i="1">
+                            <a:solidFill>
+                              <a:schemeClr val="tx1"/>
+                            </a:solidFill>
+                            <a:latin typeface="Cambria Math" panose="02040503050406030204" pitchFamily="18" charset="0"/>
+                            <a:cs typeface="Times New Roman" panose="02020603050405020304" pitchFamily="18" charset="0"/>
+                          </a:rPr>
+                        </m:ctrlPr>
+                      </m:sSubPr>
+                      <m:e>
+                        <m:r>
+                          <a:rPr lang="en-US" i="1">
+                            <a:solidFill>
+                              <a:schemeClr val="tx1"/>
                             </a:solidFill>
                             <a:latin typeface="Cambria Math" panose="02040503050406030204" pitchFamily="18" charset="0"/>
                             <a:cs typeface="Times New Roman" panose="02020603050405020304" pitchFamily="18" charset="0"/>
@@ -15125,9 +15514,9 @@
                       </m:e>
                       <m:sub>
                         <m:r>
-                          <a:rPr lang="en-US" b="0" i="1" smtClean="0">
+                          <a:rPr lang="en-US" i="1">
                             <a:solidFill>
-                              <a:srgbClr val="0033CC"/>
+                              <a:schemeClr val="tx1"/>
                             </a:solidFill>
                             <a:latin typeface="Cambria Math" panose="02040503050406030204" pitchFamily="18" charset="0"/>
                             <a:cs typeface="Times New Roman" panose="02020603050405020304" pitchFamily="18" charset="0"/>
@@ -15137,9 +15526,9 @@
                       </m:sub>
                     </m:sSub>
                     <m:r>
-                      <a:rPr lang="en-US" b="0" i="1" smtClean="0">
+                      <a:rPr lang="en-US" i="1">
                         <a:solidFill>
-                          <a:srgbClr val="0033CC"/>
+                          <a:schemeClr val="tx1"/>
                         </a:solidFill>
                         <a:latin typeface="Cambria Math" panose="02040503050406030204" pitchFamily="18" charset="0"/>
                         <a:cs typeface="Times New Roman" panose="02020603050405020304" pitchFamily="18" charset="0"/>
@@ -15147,9 +15536,9 @@
                       <m:t>|</m:t>
                     </m:r>
                     <m:r>
-                      <a:rPr lang="en-US" b="0" i="1" smtClean="0">
+                      <a:rPr lang="en-US" i="1">
                         <a:solidFill>
-                          <a:srgbClr val="0033CC"/>
+                          <a:schemeClr val="tx1"/>
                         </a:solidFill>
                         <a:latin typeface="Cambria Math" panose="02040503050406030204" pitchFamily="18" charset="0"/>
                         <a:cs typeface="Times New Roman" panose="02020603050405020304" pitchFamily="18" charset="0"/>
@@ -15157,29 +15546,36 @@
                       <m:t>𝜃</m:t>
                     </m:r>
                     <m:r>
-                      <a:rPr lang="en-US" b="0" i="1" smtClean="0">
+                      <a:rPr lang="en-US" i="1">
                         <a:solidFill>
-                          <a:srgbClr val="0033CC"/>
+                          <a:schemeClr val="tx1"/>
                         </a:solidFill>
                         <a:latin typeface="Cambria Math" panose="02040503050406030204" pitchFamily="18" charset="0"/>
                         <a:cs typeface="Times New Roman" panose="02020603050405020304" pitchFamily="18" charset="0"/>
                       </a:rPr>
-                      <m:t>)</m:t>
+                      <m:t>)≤1−</m:t>
+                    </m:r>
+                    <m:r>
+                      <a:rPr lang="en-US" b="0" i="1" smtClean="0">
+                        <a:solidFill>
+                          <a:schemeClr val="tx1"/>
+                        </a:solidFill>
+                        <a:latin typeface="Cambria Math" panose="02040503050406030204" pitchFamily="18" charset="0"/>
+                        <a:cs typeface="Times New Roman" panose="02020603050405020304" pitchFamily="18" charset="0"/>
+                      </a:rPr>
+                      <m:t>𝛼</m:t>
                     </m:r>
                   </m:oMath>
                 </a14:m>
-                <a:r>
+                <a:br>
                   <a:rPr lang="en-US" dirty="0">
+                    <a:solidFill>
+                      <a:schemeClr val="tx1"/>
+                    </a:solidFill>
                     <a:latin typeface="Times New Roman" panose="02020603050405020304" pitchFamily="18" charset="0"/>
                     <a:cs typeface="Times New Roman" panose="02020603050405020304" pitchFamily="18" charset="0"/>
                   </a:rPr>
-                  <a:t>.</a:t>
-                </a:r>
-              </a:p>
-              <a:p>
-                <a:pPr marL="0" indent="0">
-                  <a:buNone/>
-                </a:pPr>
+                </a:br>
                 <a:endParaRPr lang="en-US" dirty="0">
                   <a:latin typeface="Times New Roman" panose="02020603050405020304" pitchFamily="18" charset="0"/>
                   <a:cs typeface="Times New Roman" panose="02020603050405020304" pitchFamily="18" charset="0"/>
@@ -15188,13 +15584,13 @@
             </p:txBody>
           </p:sp>
         </mc:Choice>
-        <mc:Fallback xmlns="">
+        <mc:Fallback>
           <p:sp>
             <p:nvSpPr>
               <p:cNvPr id="10" name="Content Placeholder 9">
                 <a:extLst>
                   <a:ext uri="{FF2B5EF4-FFF2-40B4-BE49-F238E27FC236}">
-                    <a16:creationId xmlns:a16="http://schemas.microsoft.com/office/drawing/2014/main" id="{3813272D-D487-A9AF-0F95-B7A3A5544C44}"/>
+                    <a16:creationId xmlns:a16="http://schemas.microsoft.com/office/drawing/2014/main" id="{0114A438-7BBD-3FD2-1A23-CC0CD6BB8984}"/>
                   </a:ext>
                 </a:extLst>
               </p:cNvPr>
@@ -15231,165 +15627,13 @@
     </p:spTree>
     <p:extLst>
       <p:ext uri="{BB962C8B-B14F-4D97-AF65-F5344CB8AC3E}">
-        <p14:creationId xmlns:p14="http://schemas.microsoft.com/office/powerpoint/2010/main" val="2205404216"/>
+        <p14:creationId xmlns:p14="http://schemas.microsoft.com/office/powerpoint/2010/main" val="97713119"/>
       </p:ext>
     </p:extLst>
   </p:cSld>
   <p:clrMapOvr>
     <a:masterClrMapping/>
   </p:clrMapOvr>
-  <p:timing>
-    <p:tnLst>
-      <p:par>
-        <p:cTn id="1" dur="indefinite" restart="never" nodeType="tmRoot">
-          <p:childTnLst>
-            <p:seq concurrent="1" nextAc="seek">
-              <p:cTn id="2" dur="indefinite" nodeType="mainSeq">
-                <p:childTnLst>
-                  <p:par>
-                    <p:cTn id="3" fill="hold">
-                      <p:stCondLst>
-                        <p:cond delay="indefinite"/>
-                      </p:stCondLst>
-                      <p:childTnLst>
-                        <p:par>
-                          <p:cTn id="4" fill="hold">
-                            <p:stCondLst>
-                              <p:cond delay="0"/>
-                            </p:stCondLst>
-                            <p:childTnLst>
-                              <p:par>
-                                <p:cTn id="5" presetID="10" presetClass="entr" presetSubtype="0" fill="hold" nodeType="clickEffect">
-                                  <p:stCondLst>
-                                    <p:cond delay="0"/>
-                                  </p:stCondLst>
-                                  <p:childTnLst>
-                                    <p:set>
-                                      <p:cBhvr>
-                                        <p:cTn id="6" dur="1" fill="hold">
-                                          <p:stCondLst>
-                                            <p:cond delay="0"/>
-                                          </p:stCondLst>
-                                        </p:cTn>
-                                        <p:tgtEl>
-                                          <p:spTgt spid="10">
-                                            <p:txEl>
-                                              <p:pRg st="1" end="1"/>
-                                            </p:txEl>
-                                          </p:spTgt>
-                                        </p:tgtEl>
-                                        <p:attrNameLst>
-                                          <p:attrName>style.visibility</p:attrName>
-                                        </p:attrNameLst>
-                                      </p:cBhvr>
-                                      <p:to>
-                                        <p:strVal val="visible"/>
-                                      </p:to>
-                                    </p:set>
-                                    <p:animEffect transition="in" filter="fade">
-                                      <p:cBhvr>
-                                        <p:cTn id="7" dur="500"/>
-                                        <p:tgtEl>
-                                          <p:spTgt spid="10">
-                                            <p:txEl>
-                                              <p:pRg st="1" end="1"/>
-                                            </p:txEl>
-                                          </p:spTgt>
-                                        </p:tgtEl>
-                                      </p:cBhvr>
-                                    </p:animEffect>
-                                  </p:childTnLst>
-                                </p:cTn>
-                              </p:par>
-                            </p:childTnLst>
-                          </p:cTn>
-                        </p:par>
-                      </p:childTnLst>
-                    </p:cTn>
-                  </p:par>
-                  <p:par>
-                    <p:cTn id="8" fill="hold">
-                      <p:stCondLst>
-                        <p:cond delay="indefinite"/>
-                      </p:stCondLst>
-                      <p:childTnLst>
-                        <p:par>
-                          <p:cTn id="9" fill="hold">
-                            <p:stCondLst>
-                              <p:cond delay="0"/>
-                            </p:stCondLst>
-                            <p:childTnLst>
-                              <p:par>
-                                <p:cTn id="10" presetID="10" presetClass="entr" presetSubtype="0" fill="hold" nodeType="clickEffect">
-                                  <p:stCondLst>
-                                    <p:cond delay="0"/>
-                                  </p:stCondLst>
-                                  <p:childTnLst>
-                                    <p:set>
-                                      <p:cBhvr>
-                                        <p:cTn id="11" dur="1" fill="hold">
-                                          <p:stCondLst>
-                                            <p:cond delay="0"/>
-                                          </p:stCondLst>
-                                        </p:cTn>
-                                        <p:tgtEl>
-                                          <p:spTgt spid="10">
-                                            <p:txEl>
-                                              <p:pRg st="2" end="2"/>
-                                            </p:txEl>
-                                          </p:spTgt>
-                                        </p:tgtEl>
-                                        <p:attrNameLst>
-                                          <p:attrName>style.visibility</p:attrName>
-                                        </p:attrNameLst>
-                                      </p:cBhvr>
-                                      <p:to>
-                                        <p:strVal val="visible"/>
-                                      </p:to>
-                                    </p:set>
-                                    <p:animEffect transition="in" filter="fade">
-                                      <p:cBhvr>
-                                        <p:cTn id="12" dur="500"/>
-                                        <p:tgtEl>
-                                          <p:spTgt spid="10">
-                                            <p:txEl>
-                                              <p:pRg st="2" end="2"/>
-                                            </p:txEl>
-                                          </p:spTgt>
-                                        </p:tgtEl>
-                                      </p:cBhvr>
-                                    </p:animEffect>
-                                  </p:childTnLst>
-                                </p:cTn>
-                              </p:par>
-                            </p:childTnLst>
-                          </p:cTn>
-                        </p:par>
-                      </p:childTnLst>
-                    </p:cTn>
-                  </p:par>
-                </p:childTnLst>
-              </p:cTn>
-              <p:prevCondLst>
-                <p:cond evt="onPrev" delay="0">
-                  <p:tgtEl>
-                    <p:sldTgt/>
-                  </p:tgtEl>
-                </p:cond>
-              </p:prevCondLst>
-              <p:nextCondLst>
-                <p:cond evt="onNext" delay="0">
-                  <p:tgtEl>
-                    <p:sldTgt/>
-                  </p:tgtEl>
-                </p:cond>
-              </p:nextCondLst>
-            </p:seq>
-          </p:childTnLst>
-        </p:cTn>
-      </p:par>
-    </p:tnLst>
-  </p:timing>
 </p:sld>
 </file>
 
